--- a/artifacts/speaking-portfolio-expanded/decks/product-engineering-40min-handout.pptx
+++ b/artifacts/speaking-portfolio-expanded/decks/product-engineering-40min-handout.pptx
@@ -2402,6 +2402,52 @@
                 <a:ea typeface="Arial"/>
                 <a:cs typeface="Arial"/>
               </a:rPr>
+              <a:t xml:space="preserve">![Prediction: tokens stop being a build cost and become a running cost. A shipped product with no new features still burns tokens to stay current and to defend itself, and somebody owns that meter.](../../reveal-talks/assets/product-engineering/fuel.svg)</a:t>
+            </a:r>
+            <a:endParaRPr lang="en-US" sz="1200"/>
+          </a:p>
+          <a:p>
+            <a:pPr marL="0" indent="0">
+              <a:lnSpc>
+                <a:spcPts val="1560"/>
+              </a:lnSpc>
+              <a:spcAft>
+                <a:spcPts val="0"/>
+              </a:spcAft>
+              <a:buNone/>
+            </a:pPr>
+            <a:r>
+              <a:rPr lang="en-US" sz="1200" b="0">
+                <a:solidFill>
+                  <a:srgbClr val="202b33"/>
+                </a:solidFill>
+                <a:latin typeface="Arial"/>
+                <a:ea typeface="Arial"/>
+                <a:cs typeface="Arial"/>
+              </a:rPr>
+              <a:t xml:space="preserve"/>
+            </a:r>
+            <a:endParaRPr lang="en-US" sz="1200"/>
+          </a:p>
+          <a:p>
+            <a:pPr marL="0" indent="0">
+              <a:lnSpc>
+                <a:spcPts val="1560"/>
+              </a:lnSpc>
+              <a:spcAft>
+                <a:spcPts val="0"/>
+              </a:spcAft>
+              <a:buNone/>
+            </a:pPr>
+            <a:r>
+              <a:rPr lang="en-US" sz="1200" b="0">
+                <a:solidFill>
+                  <a:srgbClr val="202b33"/>
+                </a:solidFill>
+                <a:latin typeface="Arial"/>
+                <a:ea typeface="Arial"/>
+                <a:cs typeface="Arial"/>
+              </a:rPr>
               <a:t xml:space="preserve">&gt; Tokens stop being a build cost and become a running cost</a:t>
             </a:r>
             <a:endParaRPr lang="en-US" sz="1200"/>
@@ -2929,6 +2975,52 @@
                 <a:ea typeface="Arial"/>
                 <a:cs typeface="Arial"/>
               </a:rPr>
+              <a:t xml:space="preserve">![Prediction: tokens stop being a build cost and become a running cost. A shipped product with no new features still burns tokens to stay current and to defend itself, and somebody owns that meter.](../../reveal-talks/assets/product-engineering/fuel.svg)</a:t>
+            </a:r>
+            <a:endParaRPr lang="en-US" sz="1200"/>
+          </a:p>
+          <a:p>
+            <a:pPr marL="0" indent="0">
+              <a:lnSpc>
+                <a:spcPts val="1560"/>
+              </a:lnSpc>
+              <a:spcAft>
+                <a:spcPts val="0"/>
+              </a:spcAft>
+              <a:buNone/>
+            </a:pPr>
+            <a:r>
+              <a:rPr lang="en-US" sz="1200" b="0">
+                <a:solidFill>
+                  <a:srgbClr val="202b33"/>
+                </a:solidFill>
+                <a:latin typeface="Arial"/>
+                <a:ea typeface="Arial"/>
+                <a:cs typeface="Arial"/>
+              </a:rPr>
+              <a:t xml:space="preserve"/>
+            </a:r>
+            <a:endParaRPr lang="en-US" sz="1200"/>
+          </a:p>
+          <a:p>
+            <a:pPr marL="0" indent="0">
+              <a:lnSpc>
+                <a:spcPts val="1560"/>
+              </a:lnSpc>
+              <a:spcAft>
+                <a:spcPts val="0"/>
+              </a:spcAft>
+              <a:buNone/>
+            </a:pPr>
+            <a:r>
+              <a:rPr lang="en-US" sz="1200" b="0">
+                <a:solidFill>
+                  <a:srgbClr val="202b33"/>
+                </a:solidFill>
+                <a:latin typeface="Arial"/>
+                <a:ea typeface="Arial"/>
+                <a:cs typeface="Arial"/>
+              </a:rPr>
               <a:t xml:space="preserve">&gt; Tokens stop being a build cost and become a running cost</a:t>
             </a:r>
             <a:endParaRPr lang="en-US" sz="1200"/>
@@ -3456,6 +3548,52 @@
                 <a:ea typeface="Arial"/>
                 <a:cs typeface="Arial"/>
               </a:rPr>
+              <a:t xml:space="preserve">![Prediction: a grid of chosen apps gives way to one generated surface, adapting per person, with a revived terminal beside it. Who owns that channel is still open, and non-frontier builders can rethink any app as AI-native.](../../reveal-talks/assets/product-engineering/channel.svg)</a:t>
+            </a:r>
+            <a:endParaRPr lang="en-US" sz="1200"/>
+          </a:p>
+          <a:p>
+            <a:pPr marL="0" indent="0">
+              <a:lnSpc>
+                <a:spcPts val="1560"/>
+              </a:lnSpc>
+              <a:spcAft>
+                <a:spcPts val="0"/>
+              </a:spcAft>
+              <a:buNone/>
+            </a:pPr>
+            <a:r>
+              <a:rPr lang="en-US" sz="1200" b="0">
+                <a:solidFill>
+                  <a:srgbClr val="202b33"/>
+                </a:solidFill>
+                <a:latin typeface="Arial"/>
+                <a:ea typeface="Arial"/>
+                <a:cs typeface="Arial"/>
+              </a:rPr>
+              <a:t xml:space="preserve"/>
+            </a:r>
+            <a:endParaRPr lang="en-US" sz="1200"/>
+          </a:p>
+          <a:p>
+            <a:pPr marL="0" indent="0">
+              <a:lnSpc>
+                <a:spcPts val="1560"/>
+              </a:lnSpc>
+              <a:spcAft>
+                <a:spcPts val="0"/>
+              </a:spcAft>
+              <a:buNone/>
+            </a:pPr>
+            <a:r>
+              <a:rPr lang="en-US" sz="1200" b="0">
+                <a:solidFill>
+                  <a:srgbClr val="202b33"/>
+                </a:solidFill>
+                <a:latin typeface="Arial"/>
+                <a:ea typeface="Arial"/>
+                <a:cs typeface="Arial"/>
+              </a:rPr>
               <a:t xml:space="preserve">&gt; Generated UI, adapting in real time, per person</a:t>
             </a:r>
             <a:endParaRPr lang="en-US" sz="1200"/>
@@ -3938,6 +4076,52 @@
                 <a:cs typeface="Arial"/>
               </a:rPr>
               <a:t xml:space="preserve">32:30 to 35:30 · land</a:t>
+            </a:r>
+            <a:endParaRPr lang="en-US" sz="1200"/>
+          </a:p>
+          <a:p>
+            <a:pPr marL="0" indent="0">
+              <a:lnSpc>
+                <a:spcPts val="1560"/>
+              </a:lnSpc>
+              <a:spcAft>
+                <a:spcPts val="0"/>
+              </a:spcAft>
+              <a:buNone/>
+            </a:pPr>
+            <a:r>
+              <a:rPr lang="en-US" sz="1200" b="0">
+                <a:solidFill>
+                  <a:srgbClr val="202b33"/>
+                </a:solidFill>
+                <a:latin typeface="Arial"/>
+                <a:ea typeface="Arial"/>
+                <a:cs typeface="Arial"/>
+              </a:rPr>
+              <a:t xml:space="preserve"/>
+            </a:r>
+            <a:endParaRPr lang="en-US" sz="1200"/>
+          </a:p>
+          <a:p>
+            <a:pPr marL="0" indent="0">
+              <a:lnSpc>
+                <a:spcPts val="1560"/>
+              </a:lnSpc>
+              <a:spcAft>
+                <a:spcPts val="0"/>
+              </a:spcAft>
+              <a:buNone/>
+            </a:pPr>
+            <a:r>
+              <a:rPr lang="en-US" sz="1200" b="0">
+                <a:solidFill>
+                  <a:srgbClr val="202b33"/>
+                </a:solidFill>
+                <a:latin typeface="Arial"/>
+                <a:ea typeface="Arial"/>
+                <a:cs typeface="Arial"/>
+              </a:rPr>
+              <a:t xml:space="preserve">![Prediction: a grid of chosen apps gives way to one generated surface, adapting per person, with a revived terminal beside it. Who owns that channel is still open, and non-frontier builders can rethink any app as AI-native.](../../reveal-talks/assets/product-engineering/channel.svg)</a:t>
             </a:r>
             <a:endParaRPr lang="en-US" sz="1200"/>
           </a:p>
@@ -14028,14 +14212,69 @@
       </p:sp>
       <p:sp>
         <p:nvSpPr>
-          <p:cNvPr id="4" name="Text 4"/>
+          <p:cNvPr id="4" name="Image background"/>
+          <p:cNvSpPr/>
+          <p:nvPr/>
+        </p:nvSpPr>
+        <p:spPr>
+          <a:xfrm>
+            <a:off x="1554480" y="1781175"/>
+            <a:ext cx="6949440" cy="2714625"/>
+          </a:xfrm>
+          <a:prstGeom prst="rect">
+            <a:avLst/>
+          </a:prstGeom>
+          <a:solidFill>
+            <a:srgbClr val="161D26"/>
+          </a:solidFill>
+          <a:ln>
+            <a:noFill/>
+          </a:ln>
+        </p:spPr>
+      </p:sp>
+      <p:pic>
+        <p:nvPicPr>
+          <p:cNvPr id="5" name="da77ca1e4e5418bd2fa4cf46388998c2f435dc1571b24610451ddae64742a217" descr="Prediction: tokens stop being a build cost and become a running cost. A shipped product with no new features still burns tokens to stay current and to defend itself, and somebody owns that meter."/>
+          <p:cNvPicPr>
+            <a:picLocks noChangeAspect="1"/>
+          </p:cNvPicPr>
+          <p:nvPr/>
+        </p:nvPicPr>
+        <p:blipFill>
+          <a:blip r:embed="rIdImage1">
+            <a:extLst>
+              <a:ext uri="{96DAC541-7B7A-43D3-8B79-37D633B846F1}">
+                <asvg:svgBlip xmlns:asvg="http://schemas.microsoft.com/office/drawing/2016/SVG/main" r:embed="rIdSvg1"/>
+              </a:ext>
+            </a:extLst>
+          </a:blip>
+          <a:stretch>
+            <a:fillRect/>
+          </a:stretch>
+        </p:blipFill>
+        <p:spPr>
+          <a:xfrm>
+            <a:off x="1554480" y="1781175"/>
+            <a:ext cx="6949440" cy="2714625"/>
+          </a:xfrm>
+          <a:prstGeom prst="rect">
+            <a:avLst/>
+          </a:prstGeom>
+          <a:ln>
+            <a:noFill/>
+          </a:ln>
+        </p:spPr>
+      </p:pic>
+      <p:sp>
+        <p:nvSpPr>
+          <p:cNvPr id="6" name="Text 6"/>
           <p:cNvSpPr txBox="1"/>
           <p:nvPr/>
         </p:nvSpPr>
         <p:spPr>
           <a:xfrm>
-            <a:off x="457200" y="1971675"/>
-            <a:ext cx="4352925" cy="5314950"/>
+            <a:off x="457200" y="4648200"/>
+            <a:ext cx="4352925" cy="2647950"/>
           </a:xfrm>
           <a:prstGeom prst="rect">
             <a:avLst/>
@@ -14053,61 +14292,61 @@
           <a:p>
             <a:pPr marL="0" indent="0">
               <a:lnSpc>
-                <a:spcPts val="1950"/>
-              </a:lnSpc>
-              <a:spcAft>
-                <a:spcPts val="0"/>
-              </a:spcAft>
-              <a:buNone/>
-            </a:pPr>
-            <a:r>
-              <a:rPr lang="en-US" sz="1500" b="0">
-                <a:solidFill>
-                  <a:srgbClr val="202B33"/>
-                </a:solidFill>
-                <a:latin typeface="Arial"/>
-                <a:ea typeface="Arial"/>
-                <a:cs typeface="Arial"/>
-              </a:rPr>
-              <a:t xml:space="preserve">Tokens stop being a build cost and become a</a:t>
-            </a:r>
-            <a:endParaRPr lang="en-US" sz="1500"/>
-          </a:p>
-          <a:p>
-            <a:pPr marL="0" indent="0">
-              <a:lnSpc>
-                <a:spcPts val="1950"/>
-              </a:lnSpc>
-              <a:spcAft>
-                <a:spcPts val="0"/>
-              </a:spcAft>
-              <a:buNone/>
-            </a:pPr>
-            <a:r>
-              <a:rPr lang="en-US" sz="1500" b="0">
-                <a:solidFill>
-                  <a:srgbClr val="202B33"/>
-                </a:solidFill>
-                <a:latin typeface="Arial"/>
-                <a:ea typeface="Arial"/>
-                <a:cs typeface="Arial"/>
-              </a:rPr>
-              <a:t xml:space="preserve">running cost</a:t>
-            </a:r>
-            <a:endParaRPr lang="en-US" sz="1500"/>
-          </a:p>
-          <a:p>
-            <a:pPr marL="0" indent="0">
-              <a:lnSpc>
-                <a:spcPts val="1950"/>
-              </a:lnSpc>
-              <a:spcAft>
-                <a:spcPts val="0"/>
-              </a:spcAft>
-              <a:buNone/>
-            </a:pPr>
-            <a:r>
-              <a:rPr lang="en-US" sz="1500" b="0">
+                <a:spcPts val="1575"/>
+              </a:lnSpc>
+              <a:spcAft>
+                <a:spcPts val="0"/>
+              </a:spcAft>
+              <a:buNone/>
+            </a:pPr>
+            <a:r>
+              <a:rPr lang="en-US" sz="1200" b="0">
+                <a:solidFill>
+                  <a:srgbClr val="202B33"/>
+                </a:solidFill>
+                <a:latin typeface="Arial"/>
+                <a:ea typeface="Arial"/>
+                <a:cs typeface="Arial"/>
+              </a:rPr>
+              <a:t xml:space="preserve">Tokens stop being a build cost and become a running</a:t>
+            </a:r>
+            <a:endParaRPr lang="en-US" sz="1200"/>
+          </a:p>
+          <a:p>
+            <a:pPr marL="0" indent="0">
+              <a:lnSpc>
+                <a:spcPts val="1575"/>
+              </a:lnSpc>
+              <a:spcAft>
+                <a:spcPts val="0"/>
+              </a:spcAft>
+              <a:buNone/>
+            </a:pPr>
+            <a:r>
+              <a:rPr lang="en-US" sz="1200" b="0">
+                <a:solidFill>
+                  <a:srgbClr val="202B33"/>
+                </a:solidFill>
+                <a:latin typeface="Arial"/>
+                <a:ea typeface="Arial"/>
+                <a:cs typeface="Arial"/>
+              </a:rPr>
+              <a:t xml:space="preserve">cost</a:t>
+            </a:r>
+            <a:endParaRPr lang="en-US" sz="1200"/>
+          </a:p>
+          <a:p>
+            <a:pPr marL="0" indent="0">
+              <a:lnSpc>
+                <a:spcPts val="1575"/>
+              </a:lnSpc>
+              <a:spcAft>
+                <a:spcPts val="0"/>
+              </a:spcAft>
+              <a:buNone/>
+            </a:pPr>
+            <a:r>
+              <a:rPr lang="en-US" sz="1200" b="0">
                 <a:solidFill>
                   <a:srgbClr val="202B33"/>
                 </a:solidFill>
@@ -14117,66 +14356,66 @@
               </a:rPr>
               <a:t xml:space="preserve"/>
             </a:r>
-            <a:endParaRPr lang="en-US" sz="1500"/>
-          </a:p>
-          <a:p>
-            <a:pPr marL="0" indent="0">
-              <a:lnSpc>
-                <a:spcPts val="1950"/>
-              </a:lnSpc>
-              <a:spcAft>
-                <a:spcPts val="0"/>
-              </a:spcAft>
-              <a:buNone/>
-            </a:pPr>
-            <a:r>
-              <a:rPr lang="en-US" sz="1500" b="0">
-                <a:solidFill>
-                  <a:srgbClr val="202B33"/>
-                </a:solidFill>
-                <a:latin typeface="Arial"/>
-                <a:ea typeface="Arial"/>
-                <a:cs typeface="Arial"/>
-              </a:rPr>
-              <a:t xml:space="preserve">Sentry bots hunting your own</a:t>
-            </a:r>
-            <a:endParaRPr lang="en-US" sz="1500"/>
-          </a:p>
-          <a:p>
-            <a:pPr marL="0" indent="0">
-              <a:lnSpc>
-                <a:spcPts val="1950"/>
-              </a:lnSpc>
-              <a:spcAft>
-                <a:spcPts val="0"/>
-              </a:spcAft>
-              <a:buNone/>
-            </a:pPr>
-            <a:r>
-              <a:rPr lang="en-US" sz="1500" b="0">
-                <a:solidFill>
-                  <a:srgbClr val="202B33"/>
-                </a:solidFill>
-                <a:latin typeface="Arial"/>
-                <a:ea typeface="Arial"/>
-                <a:cs typeface="Arial"/>
-              </a:rPr>
-              <a:t xml:space="preserve">vulnerabilities, 24/7, forever</a:t>
-            </a:r>
-            <a:endParaRPr lang="en-US" sz="1500"/>
-          </a:p>
-          <a:p>
-            <a:pPr marL="0" indent="0">
-              <a:lnSpc>
-                <a:spcPts val="1950"/>
-              </a:lnSpc>
-              <a:spcAft>
-                <a:spcPts val="0"/>
-              </a:spcAft>
-              <a:buNone/>
-            </a:pPr>
-            <a:r>
-              <a:rPr lang="en-US" sz="1500" b="0">
+            <a:endParaRPr lang="en-US" sz="1200"/>
+          </a:p>
+          <a:p>
+            <a:pPr marL="0" indent="0">
+              <a:lnSpc>
+                <a:spcPts val="1575"/>
+              </a:lnSpc>
+              <a:spcAft>
+                <a:spcPts val="0"/>
+              </a:spcAft>
+              <a:buNone/>
+            </a:pPr>
+            <a:r>
+              <a:rPr lang="en-US" sz="1200" b="0">
+                <a:solidFill>
+                  <a:srgbClr val="202B33"/>
+                </a:solidFill>
+                <a:latin typeface="Arial"/>
+                <a:ea typeface="Arial"/>
+                <a:cs typeface="Arial"/>
+              </a:rPr>
+              <a:t xml:space="preserve">Sentry bots hunting your own vulnerabilities, 24/7,</a:t>
+            </a:r>
+            <a:endParaRPr lang="en-US" sz="1200"/>
+          </a:p>
+          <a:p>
+            <a:pPr marL="0" indent="0">
+              <a:lnSpc>
+                <a:spcPts val="1575"/>
+              </a:lnSpc>
+              <a:spcAft>
+                <a:spcPts val="0"/>
+              </a:spcAft>
+              <a:buNone/>
+            </a:pPr>
+            <a:r>
+              <a:rPr lang="en-US" sz="1200" b="0">
+                <a:solidFill>
+                  <a:srgbClr val="202B33"/>
+                </a:solidFill>
+                <a:latin typeface="Arial"/>
+                <a:ea typeface="Arial"/>
+                <a:cs typeface="Arial"/>
+              </a:rPr>
+              <a:t xml:space="preserve">forever</a:t>
+            </a:r>
+            <a:endParaRPr lang="en-US" sz="1200"/>
+          </a:p>
+          <a:p>
+            <a:pPr marL="0" indent="0">
+              <a:lnSpc>
+                <a:spcPts val="1575"/>
+              </a:lnSpc>
+              <a:spcAft>
+                <a:spcPts val="0"/>
+              </a:spcAft>
+              <a:buNone/>
+            </a:pPr>
+            <a:r>
+              <a:rPr lang="en-US" sz="1200" b="0">
                 <a:solidFill>
                   <a:srgbClr val="202B33"/>
                 </a:solidFill>
@@ -14186,66 +14425,66 @@
               </a:rPr>
               <a:t xml:space="preserve"/>
             </a:r>
-            <a:endParaRPr lang="en-US" sz="1500"/>
-          </a:p>
-          <a:p>
-            <a:pPr marL="0" indent="0">
-              <a:lnSpc>
-                <a:spcPts val="1950"/>
-              </a:lnSpc>
-              <a:spcAft>
-                <a:spcPts val="0"/>
-              </a:spcAft>
-              <a:buNone/>
-            </a:pPr>
-            <a:r>
-              <a:rPr lang="en-US" sz="1500" b="0">
-                <a:solidFill>
-                  <a:srgbClr val="202B33"/>
-                </a:solidFill>
-                <a:latin typeface="Arial"/>
-                <a:ea typeface="Arial"/>
-                <a:cs typeface="Arial"/>
-              </a:rPr>
-              <a:t xml:space="preserve">Be careful firing the security bots. They</a:t>
-            </a:r>
-            <a:endParaRPr lang="en-US" sz="1500"/>
-          </a:p>
-          <a:p>
-            <a:pPr marL="0" indent="0">
-              <a:lnSpc>
-                <a:spcPts val="1950"/>
-              </a:lnSpc>
-              <a:spcAft>
-                <a:spcPts val="0"/>
-              </a:spcAft>
-              <a:buNone/>
-            </a:pPr>
-            <a:r>
-              <a:rPr lang="en-US" sz="1500" b="0">
-                <a:solidFill>
-                  <a:srgbClr val="202B33"/>
-                </a:solidFill>
-                <a:latin typeface="Arial"/>
-                <a:ea typeface="Arial"/>
-                <a:cs typeface="Arial"/>
-              </a:rPr>
-              <a:t xml:space="preserve">know who you are.</a:t>
-            </a:r>
-            <a:endParaRPr lang="en-US" sz="1500"/>
-          </a:p>
-          <a:p>
-            <a:pPr marL="0" indent="0">
-              <a:lnSpc>
-                <a:spcPts val="1950"/>
-              </a:lnSpc>
-              <a:spcAft>
-                <a:spcPts val="0"/>
-              </a:spcAft>
-              <a:buNone/>
-            </a:pPr>
-            <a:r>
-              <a:rPr lang="en-US" sz="1500" b="0">
+            <a:endParaRPr lang="en-US" sz="1200"/>
+          </a:p>
+          <a:p>
+            <a:pPr marL="0" indent="0">
+              <a:lnSpc>
+                <a:spcPts val="1575"/>
+              </a:lnSpc>
+              <a:spcAft>
+                <a:spcPts val="0"/>
+              </a:spcAft>
+              <a:buNone/>
+            </a:pPr>
+            <a:r>
+              <a:rPr lang="en-US" sz="1200" b="0">
+                <a:solidFill>
+                  <a:srgbClr val="202B33"/>
+                </a:solidFill>
+                <a:latin typeface="Arial"/>
+                <a:ea typeface="Arial"/>
+                <a:cs typeface="Arial"/>
+              </a:rPr>
+              <a:t xml:space="preserve">Be careful firing the security bots. They know who</a:t>
+            </a:r>
+            <a:endParaRPr lang="en-US" sz="1200"/>
+          </a:p>
+          <a:p>
+            <a:pPr marL="0" indent="0">
+              <a:lnSpc>
+                <a:spcPts val="1575"/>
+              </a:lnSpc>
+              <a:spcAft>
+                <a:spcPts val="0"/>
+              </a:spcAft>
+              <a:buNone/>
+            </a:pPr>
+            <a:r>
+              <a:rPr lang="en-US" sz="1200" b="0">
+                <a:solidFill>
+                  <a:srgbClr val="202B33"/>
+                </a:solidFill>
+                <a:latin typeface="Arial"/>
+                <a:ea typeface="Arial"/>
+                <a:cs typeface="Arial"/>
+              </a:rPr>
+              <a:t xml:space="preserve">you are.</a:t>
+            </a:r>
+            <a:endParaRPr lang="en-US" sz="1200"/>
+          </a:p>
+          <a:p>
+            <a:pPr marL="0" indent="0">
+              <a:lnSpc>
+                <a:spcPts val="1575"/>
+              </a:lnSpc>
+              <a:spcAft>
+                <a:spcPts val="0"/>
+              </a:spcAft>
+              <a:buNone/>
+            </a:pPr>
+            <a:r>
+              <a:rPr lang="en-US" sz="1200" b="0">
                 <a:solidFill>
                   <a:srgbClr val="202B33"/>
                 </a:solidFill>
@@ -14255,227 +14494,66 @@
               </a:rPr>
               <a:t xml:space="preserve"/>
             </a:r>
-            <a:endParaRPr lang="en-US" sz="1500"/>
-          </a:p>
-          <a:p>
-            <a:pPr marL="0" indent="0">
-              <a:lnSpc>
-                <a:spcPts val="1950"/>
-              </a:lnSpc>
-              <a:spcAft>
-                <a:spcPts val="0"/>
-              </a:spcAft>
-              <a:buNone/>
-            </a:pPr>
-            <a:r>
-              <a:rPr lang="en-US" sz="1500" b="0">
-                <a:solidFill>
-                  <a:srgbClr val="202B33"/>
-                </a:solidFill>
-                <a:latin typeface="Arial"/>
-                <a:ea typeface="Arial"/>
-                <a:cs typeface="Arial"/>
-              </a:rPr>
-              <a:t xml:space="preserve">Two predictions to close on, and I will</a:t>
-            </a:r>
-            <a:endParaRPr lang="en-US" sz="1500"/>
-          </a:p>
-          <a:p>
-            <a:pPr marL="0" indent="0">
-              <a:lnSpc>
-                <a:spcPts val="1950"/>
-              </a:lnSpc>
-              <a:spcAft>
-                <a:spcPts val="0"/>
-              </a:spcAft>
-              <a:buNone/>
-            </a:pPr>
-            <a:r>
-              <a:rPr lang="en-US" sz="1500" b="0">
-                <a:solidFill>
-                  <a:srgbClr val="202B33"/>
-                </a:solidFill>
-                <a:latin typeface="Arial"/>
-                <a:ea typeface="Arial"/>
-                <a:cs typeface="Arial"/>
-              </a:rPr>
-              <a:t xml:space="preserve">label them as predictions once: this is</a:t>
-            </a:r>
-            <a:endParaRPr lang="en-US" sz="1500"/>
-          </a:p>
-          <a:p>
-            <a:pPr marL="0" indent="0">
-              <a:lnSpc>
-                <a:spcPts val="1950"/>
-              </a:lnSpc>
-              <a:spcAft>
-                <a:spcPts val="0"/>
-              </a:spcAft>
-              <a:buNone/>
-            </a:pPr>
-            <a:r>
-              <a:rPr lang="en-US" sz="1500" b="0">
-                <a:solidFill>
-                  <a:srgbClr val="202B33"/>
-                </a:solidFill>
-                <a:latin typeface="Arial"/>
-                <a:ea typeface="Arial"/>
-                <a:cs typeface="Arial"/>
-              </a:rPr>
-              <a:t xml:space="preserve">where I think the operating model goes, not</a:t>
-            </a:r>
-            <a:endParaRPr lang="en-US" sz="1500"/>
-          </a:p>
-          <a:p>
-            <a:pPr marL="0" indent="0">
-              <a:lnSpc>
-                <a:spcPts val="1950"/>
-              </a:lnSpc>
-              <a:spcAft>
-                <a:spcPts val="0"/>
-              </a:spcAft>
-              <a:buNone/>
-            </a:pPr>
-            <a:r>
-              <a:rPr lang="en-US" sz="1500" b="0">
-                <a:solidFill>
-                  <a:srgbClr val="202B33"/>
-                </a:solidFill>
-                <a:latin typeface="Arial"/>
-                <a:ea typeface="Arial"/>
-                <a:cs typeface="Arial"/>
-              </a:rPr>
-              <a:t xml:space="preserve">something I have measured. Here is the</a:t>
-            </a:r>
-            <a:endParaRPr lang="en-US" sz="1500"/>
-          </a:p>
-          <a:p>
-            <a:pPr marL="0" indent="0">
-              <a:lnSpc>
-                <a:spcPts val="1950"/>
-              </a:lnSpc>
-              <a:spcAft>
-                <a:spcPts val="0"/>
-              </a:spcAft>
-              <a:buNone/>
-            </a:pPr>
-            <a:r>
-              <a:rPr lang="en-US" sz="1500" b="0">
-                <a:solidFill>
-                  <a:srgbClr val="202B33"/>
-                </a:solidFill>
-                <a:latin typeface="Arial"/>
-                <a:ea typeface="Arial"/>
-                <a:cs typeface="Arial"/>
-              </a:rPr>
-              <a:t xml:space="preserve">first. Today you buy tokens to build</a:t>
-            </a:r>
-            <a:endParaRPr lang="en-US" sz="1500"/>
-          </a:p>
-          <a:p>
-            <a:pPr marL="0" indent="0">
-              <a:lnSpc>
-                <a:spcPts val="1950"/>
-              </a:lnSpc>
-              <a:spcAft>
-                <a:spcPts val="0"/>
-              </a:spcAft>
-              <a:buNone/>
-            </a:pPr>
-            <a:r>
-              <a:rPr lang="en-US" sz="1500" b="0">
-                <a:solidFill>
-                  <a:srgbClr val="202B33"/>
-                </a:solidFill>
-                <a:latin typeface="Arial"/>
-                <a:ea typeface="Arial"/>
-                <a:cs typeface="Arial"/>
-              </a:rPr>
-              <a:t xml:space="preserve">software. Before long most software will</a:t>
-            </a:r>
-            <a:endParaRPr lang="en-US" sz="1500"/>
-          </a:p>
-          <a:p>
-            <a:pPr marL="0" indent="0">
-              <a:lnSpc>
-                <a:spcPts val="1950"/>
-              </a:lnSpc>
-              <a:spcAft>
-                <a:spcPts val="0"/>
-              </a:spcAft>
-              <a:buNone/>
-            </a:pPr>
-            <a:r>
-              <a:rPr lang="en-US" sz="1500" b="0">
-                <a:solidFill>
-                  <a:srgbClr val="202B33"/>
-                </a:solidFill>
-                <a:latin typeface="Arial"/>
-                <a:ea typeface="Arial"/>
-                <a:cs typeface="Arial"/>
-              </a:rPr>
-              <a:t xml:space="preserve">need a steady stream of them just to keep</a:t>
-            </a:r>
-            <a:endParaRPr lang="en-US" sz="1500"/>
-          </a:p>
-          <a:p>
-            <a:pPr marL="0" indent="0">
-              <a:lnSpc>
-                <a:spcPts val="1950"/>
-              </a:lnSpc>
-              <a:spcAft>
-                <a:spcPts val="0"/>
-              </a:spcAft>
-              <a:buNone/>
-            </a:pPr>
-            <a:r>
-              <a:rPr lang="en-US" sz="1500" b="0">
-                <a:solidFill>
-                  <a:srgbClr val="202B33"/>
-                </a:solidFill>
-                <a:latin typeface="Arial"/>
-                <a:ea typeface="Arial"/>
-                <a:cs typeface="Arial"/>
-              </a:rPr>
-              <a:t xml:space="preserve">running: to stay current with its</a:t>
-            </a:r>
-            <a:endParaRPr lang="en-US" sz="1500"/>
-          </a:p>
-          <a:p>
-            <a:pPr marL="0" indent="0">
-              <a:lnSpc>
-                <a:spcPts val="1950"/>
-              </a:lnSpc>
-              <a:spcAft>
-                <a:spcPts val="0"/>
-              </a:spcAft>
-              <a:buNone/>
-            </a:pPr>
-            <a:r>
-              <a:rPr lang="en-US" sz="1500" b="0">
-                <a:solidFill>
-                  <a:srgbClr val="202B33"/>
-                </a:solidFill>
-                <a:latin typeface="Arial"/>
-                <a:ea typeface="Arial"/>
-                <a:cs typeface="Arial"/>
-              </a:rPr>
-              <a:t xml:space="preserve">dependencies, to re-derive the integration</a:t>
-            </a:r>
-            <a:endParaRPr lang="en-US" sz="1500"/>
+            <a:endParaRPr lang="en-US" sz="1200"/>
+          </a:p>
+          <a:p>
+            <a:pPr marL="0" indent="0">
+              <a:lnSpc>
+                <a:spcPts val="1575"/>
+              </a:lnSpc>
+              <a:spcAft>
+                <a:spcPts val="0"/>
+              </a:spcAft>
+              <a:buNone/>
+            </a:pPr>
+            <a:r>
+              <a:rPr lang="en-US" sz="1200" b="0">
+                <a:solidFill>
+                  <a:srgbClr val="202B33"/>
+                </a:solidFill>
+                <a:latin typeface="Arial"/>
+                <a:ea typeface="Arial"/>
+                <a:cs typeface="Arial"/>
+              </a:rPr>
+              <a:t xml:space="preserve">Two predictions to close on, and I will label them as</a:t>
+            </a:r>
+            <a:endParaRPr lang="en-US" sz="1200"/>
+          </a:p>
+          <a:p>
+            <a:pPr marL="0" indent="0">
+              <a:lnSpc>
+                <a:spcPts val="1575"/>
+              </a:lnSpc>
+              <a:spcAft>
+                <a:spcPts val="0"/>
+              </a:spcAft>
+              <a:buNone/>
+            </a:pPr>
+            <a:r>
+              <a:rPr lang="en-US" sz="1200" b="0">
+                <a:solidFill>
+                  <a:srgbClr val="202B33"/>
+                </a:solidFill>
+                <a:latin typeface="Arial"/>
+                <a:ea typeface="Arial"/>
+                <a:cs typeface="Arial"/>
+              </a:rPr>
+              <a:t xml:space="preserve">predictions once: this is where I think the operating</a:t>
+            </a:r>
+            <a:endParaRPr lang="en-US" sz="1200"/>
           </a:p>
         </p:txBody>
       </p:sp>
       <p:sp>
         <p:nvSpPr>
-          <p:cNvPr id="5" name="Text 5"/>
+          <p:cNvPr id="7" name="Text 7"/>
           <p:cNvSpPr txBox="1"/>
           <p:nvPr/>
         </p:nvSpPr>
         <p:spPr>
           <a:xfrm>
-            <a:off x="5238750" y="1971675"/>
-            <a:ext cx="4362450" cy="5314950"/>
+            <a:off x="5238750" y="4648200"/>
+            <a:ext cx="4362450" cy="2647950"/>
           </a:xfrm>
           <a:prstGeom prst="rect">
             <a:avLst/>
@@ -14493,153 +14571,245 @@
           <a:p>
             <a:pPr marL="0" indent="0">
               <a:lnSpc>
-                <a:spcPts val="1950"/>
-              </a:lnSpc>
-              <a:spcAft>
-                <a:spcPts val="0"/>
-              </a:spcAft>
-              <a:buNone/>
-            </a:pPr>
-            <a:r>
-              <a:rPr lang="en-US" sz="1500" b="0">
-                <a:solidFill>
-                  <a:srgbClr val="202B33"/>
-                </a:solidFill>
-                <a:latin typeface="Arial"/>
-                <a:ea typeface="Arial"/>
-                <a:cs typeface="Arial"/>
-              </a:rPr>
-              <a:t xml:space="preserve">a vendor renamed last night, to keep its</a:t>
-            </a:r>
-            <a:endParaRPr lang="en-US" sz="1500"/>
-          </a:p>
-          <a:p>
-            <a:pPr marL="0" indent="0">
-              <a:lnSpc>
-                <a:spcPts val="1950"/>
-              </a:lnSpc>
-              <a:spcAft>
-                <a:spcPts val="0"/>
-              </a:spcAft>
-              <a:buNone/>
-            </a:pPr>
-            <a:r>
-              <a:rPr lang="en-US" sz="1500" b="0">
-                <a:solidFill>
-                  <a:srgbClr val="202B33"/>
-                </a:solidFill>
-                <a:latin typeface="Arial"/>
-                <a:ea typeface="Arial"/>
-                <a:cs typeface="Arial"/>
-              </a:rPr>
-              <a:t xml:space="preserve">own documentation true. Steady for some</a:t>
-            </a:r>
-            <a:endParaRPr lang="en-US" sz="1500"/>
-          </a:p>
-          <a:p>
-            <a:pPr marL="0" indent="0">
-              <a:lnSpc>
-                <a:spcPts val="1950"/>
-              </a:lnSpc>
-              <a:spcAft>
-                <a:spcPts val="0"/>
-              </a:spcAft>
-              <a:buNone/>
-            </a:pPr>
-            <a:r>
-              <a:rPr lang="en-US" sz="1500" b="0">
-                <a:solidFill>
-                  <a:srgbClr val="202B33"/>
-                </a:solidFill>
-                <a:latin typeface="Arial"/>
-                <a:ea typeface="Arial"/>
-                <a:cs typeface="Arial"/>
-              </a:rPr>
-              <a:t xml:space="preserve">systems, bursty for others. Either way it</a:t>
-            </a:r>
-            <a:endParaRPr lang="en-US" sz="1500"/>
-          </a:p>
-          <a:p>
-            <a:pPr marL="0" indent="0">
-              <a:lnSpc>
-                <a:spcPts val="1950"/>
-              </a:lnSpc>
-              <a:spcAft>
-                <a:spcPts val="0"/>
-              </a:spcAft>
-              <a:buNone/>
-            </a:pPr>
-            <a:r>
-              <a:rPr lang="en-US" sz="1500" b="0">
-                <a:solidFill>
-                  <a:srgbClr val="202B33"/>
-                </a:solidFill>
-                <a:latin typeface="Arial"/>
-                <a:ea typeface="Arial"/>
-                <a:cs typeface="Arial"/>
-              </a:rPr>
-              <a:t xml:space="preserve">stops being a build cost and becomes fuel,</a:t>
-            </a:r>
-            <a:endParaRPr lang="en-US" sz="1500"/>
-          </a:p>
-          <a:p>
-            <a:pPr marL="0" indent="0">
-              <a:lnSpc>
-                <a:spcPts val="1950"/>
-              </a:lnSpc>
-              <a:spcAft>
-                <a:spcPts val="0"/>
-              </a:spcAft>
-              <a:buNone/>
-            </a:pPr>
-            <a:r>
-              <a:rPr lang="en-US" sz="1500" b="0">
-                <a:solidFill>
-                  <a:srgbClr val="202B33"/>
-                </a:solidFill>
-                <a:latin typeface="Arial"/>
-                <a:ea typeface="Arial"/>
-                <a:cs typeface="Arial"/>
-              </a:rPr>
-              <a:t xml:space="preserve">and you will meter it the way you meter</a:t>
-            </a:r>
-            <a:endParaRPr lang="en-US" sz="1500"/>
-          </a:p>
-          <a:p>
-            <a:pPr marL="0" indent="0">
-              <a:lnSpc>
-                <a:spcPts val="1950"/>
-              </a:lnSpc>
-              <a:spcAft>
-                <a:spcPts val="0"/>
-              </a:spcAft>
-              <a:buNone/>
-            </a:pPr>
-            <a:r>
-              <a:rPr lang="en-US" sz="1500" b="0">
-                <a:solidFill>
-                  <a:srgbClr val="202B33"/>
-                </a:solidFill>
-                <a:latin typeface="Arial"/>
-                <a:ea typeface="Arial"/>
-                <a:cs typeface="Arial"/>
-              </a:rPr>
-              <a:t xml:space="preserve">electricity, which is to say you will only</a:t>
-            </a:r>
-            <a:endParaRPr lang="en-US" sz="1500"/>
-          </a:p>
-          <a:p>
-            <a:pPr marL="0" indent="0">
-              <a:lnSpc>
-                <a:spcPts val="1950"/>
-              </a:lnSpc>
-              <a:spcAft>
-                <a:spcPts val="0"/>
-              </a:spcAft>
-              <a:buNone/>
-            </a:pPr>
-            <a:r>
-              <a:rPr lang="en-US" sz="1500" b="0">
+                <a:spcPts val="1575"/>
+              </a:lnSpc>
+              <a:spcAft>
+                <a:spcPts val="0"/>
+              </a:spcAft>
+              <a:buNone/>
+            </a:pPr>
+            <a:r>
+              <a:rPr lang="en-US" sz="1200" b="0">
+                <a:solidFill>
+                  <a:srgbClr val="202B33"/>
+                </a:solidFill>
+                <a:latin typeface="Arial"/>
+                <a:ea typeface="Arial"/>
+                <a:cs typeface="Arial"/>
+              </a:rPr>
+              <a:t xml:space="preserve">model goes, not something I have measured. Here is</a:t>
+            </a:r>
+            <a:endParaRPr lang="en-US" sz="1200"/>
+          </a:p>
+          <a:p>
+            <a:pPr marL="0" indent="0">
+              <a:lnSpc>
+                <a:spcPts val="1575"/>
+              </a:lnSpc>
+              <a:spcAft>
+                <a:spcPts val="0"/>
+              </a:spcAft>
+              <a:buNone/>
+            </a:pPr>
+            <a:r>
+              <a:rPr lang="en-US" sz="1200" b="0">
+                <a:solidFill>
+                  <a:srgbClr val="202B33"/>
+                </a:solidFill>
+                <a:latin typeface="Arial"/>
+                <a:ea typeface="Arial"/>
+                <a:cs typeface="Arial"/>
+              </a:rPr>
+              <a:t xml:space="preserve">the first. Today you buy tokens to build software.</a:t>
+            </a:r>
+            <a:endParaRPr lang="en-US" sz="1200"/>
+          </a:p>
+          <a:p>
+            <a:pPr marL="0" indent="0">
+              <a:lnSpc>
+                <a:spcPts val="1575"/>
+              </a:lnSpc>
+              <a:spcAft>
+                <a:spcPts val="0"/>
+              </a:spcAft>
+              <a:buNone/>
+            </a:pPr>
+            <a:r>
+              <a:rPr lang="en-US" sz="1200" b="0">
+                <a:solidFill>
+                  <a:srgbClr val="202B33"/>
+                </a:solidFill>
+                <a:latin typeface="Arial"/>
+                <a:ea typeface="Arial"/>
+                <a:cs typeface="Arial"/>
+              </a:rPr>
+              <a:t xml:space="preserve">Before long most software will need a steady stream</a:t>
+            </a:r>
+            <a:endParaRPr lang="en-US" sz="1200"/>
+          </a:p>
+          <a:p>
+            <a:pPr marL="0" indent="0">
+              <a:lnSpc>
+                <a:spcPts val="1575"/>
+              </a:lnSpc>
+              <a:spcAft>
+                <a:spcPts val="0"/>
+              </a:spcAft>
+              <a:buNone/>
+            </a:pPr>
+            <a:r>
+              <a:rPr lang="en-US" sz="1200" b="0">
+                <a:solidFill>
+                  <a:srgbClr val="202B33"/>
+                </a:solidFill>
+                <a:latin typeface="Arial"/>
+                <a:ea typeface="Arial"/>
+                <a:cs typeface="Arial"/>
+              </a:rPr>
+              <a:t xml:space="preserve">of them just to keep running: to stay current with</a:t>
+            </a:r>
+            <a:endParaRPr lang="en-US" sz="1200"/>
+          </a:p>
+          <a:p>
+            <a:pPr marL="0" indent="0">
+              <a:lnSpc>
+                <a:spcPts val="1575"/>
+              </a:lnSpc>
+              <a:spcAft>
+                <a:spcPts val="0"/>
+              </a:spcAft>
+              <a:buNone/>
+            </a:pPr>
+            <a:r>
+              <a:rPr lang="en-US" sz="1200" b="0">
+                <a:solidFill>
+                  <a:srgbClr val="202B33"/>
+                </a:solidFill>
+                <a:latin typeface="Arial"/>
+                <a:ea typeface="Arial"/>
+                <a:cs typeface="Arial"/>
+              </a:rPr>
+              <a:t xml:space="preserve">its dependencies, to re-derive the integration a</a:t>
+            </a:r>
+            <a:endParaRPr lang="en-US" sz="1200"/>
+          </a:p>
+          <a:p>
+            <a:pPr marL="0" indent="0">
+              <a:lnSpc>
+                <a:spcPts val="1575"/>
+              </a:lnSpc>
+              <a:spcAft>
+                <a:spcPts val="0"/>
+              </a:spcAft>
+              <a:buNone/>
+            </a:pPr>
+            <a:r>
+              <a:rPr lang="en-US" sz="1200" b="0">
+                <a:solidFill>
+                  <a:srgbClr val="202B33"/>
+                </a:solidFill>
+                <a:latin typeface="Arial"/>
+                <a:ea typeface="Arial"/>
+                <a:cs typeface="Arial"/>
+              </a:rPr>
+              <a:t xml:space="preserve">vendor renamed last night, to keep its own</a:t>
+            </a:r>
+            <a:endParaRPr lang="en-US" sz="1200"/>
+          </a:p>
+          <a:p>
+            <a:pPr marL="0" indent="0">
+              <a:lnSpc>
+                <a:spcPts val="1575"/>
+              </a:lnSpc>
+              <a:spcAft>
+                <a:spcPts val="0"/>
+              </a:spcAft>
+              <a:buNone/>
+            </a:pPr>
+            <a:r>
+              <a:rPr lang="en-US" sz="1200" b="0">
+                <a:solidFill>
+                  <a:srgbClr val="202B33"/>
+                </a:solidFill>
+                <a:latin typeface="Arial"/>
+                <a:ea typeface="Arial"/>
+                <a:cs typeface="Arial"/>
+              </a:rPr>
+              <a:t xml:space="preserve">documentation true. Steady for some systems, bursty</a:t>
+            </a:r>
+            <a:endParaRPr lang="en-US" sz="1200"/>
+          </a:p>
+          <a:p>
+            <a:pPr marL="0" indent="0">
+              <a:lnSpc>
+                <a:spcPts val="1575"/>
+              </a:lnSpc>
+              <a:spcAft>
+                <a:spcPts val="0"/>
+              </a:spcAft>
+              <a:buNone/>
+            </a:pPr>
+            <a:r>
+              <a:rPr lang="en-US" sz="1200" b="0">
+                <a:solidFill>
+                  <a:srgbClr val="202B33"/>
+                </a:solidFill>
+                <a:latin typeface="Arial"/>
+                <a:ea typeface="Arial"/>
+                <a:cs typeface="Arial"/>
+              </a:rPr>
+              <a:t xml:space="preserve">for others. Either way it stops being a build cost</a:t>
+            </a:r>
+            <a:endParaRPr lang="en-US" sz="1200"/>
+          </a:p>
+          <a:p>
+            <a:pPr marL="0" indent="0">
+              <a:lnSpc>
+                <a:spcPts val="1575"/>
+              </a:lnSpc>
+              <a:spcAft>
+                <a:spcPts val="0"/>
+              </a:spcAft>
+              <a:buNone/>
+            </a:pPr>
+            <a:r>
+              <a:rPr lang="en-US" sz="1200" b="0">
+                <a:solidFill>
+                  <a:srgbClr val="202B33"/>
+                </a:solidFill>
+                <a:latin typeface="Arial"/>
+                <a:ea typeface="Arial"/>
+                <a:cs typeface="Arial"/>
+              </a:rPr>
+              <a:t xml:space="preserve">and becomes fuel, and you will meter it the way you</a:t>
+            </a:r>
+            <a:endParaRPr lang="en-US" sz="1200"/>
+          </a:p>
+          <a:p>
+            <a:pPr marL="0" indent="0">
+              <a:lnSpc>
+                <a:spcPts val="1575"/>
+              </a:lnSpc>
+              <a:spcAft>
+                <a:spcPts val="0"/>
+              </a:spcAft>
+              <a:buNone/>
+            </a:pPr>
+            <a:r>
+              <a:rPr lang="en-US" sz="1200" b="0">
+                <a:solidFill>
+                  <a:srgbClr val="202B33"/>
+                </a:solidFill>
+                <a:latin typeface="Arial"/>
+                <a:ea typeface="Arial"/>
+                <a:cs typeface="Arial"/>
+              </a:rPr>
+              <a:t xml:space="preserve">meter electricity, which is to say you will only</a:t>
+            </a:r>
+            <a:endParaRPr lang="en-US" sz="1200"/>
+          </a:p>
+          <a:p>
+            <a:pPr marL="0" indent="0">
+              <a:lnSpc>
+                <a:spcPts val="1575"/>
+              </a:lnSpc>
+              <a:spcAft>
+                <a:spcPts val="0"/>
+              </a:spcAft>
+              <a:buNone/>
+            </a:pPr>
+            <a:r>
+              <a:rPr lang="en-US" sz="1200" b="0">
                 <a:solidFill>
                   <a:srgbClr val="202B33"/>
                 </a:solidFill>
@@ -14649,243 +14819,13 @@
               </a:rPr>
               <a:t xml:space="preserve">notice it when it moves.</a:t>
             </a:r>
-            <a:endParaRPr lang="en-US" sz="1500"/>
-          </a:p>
-          <a:p>
-            <a:pPr marL="0" indent="0">
-              <a:lnSpc>
-                <a:spcPts val="1950"/>
-              </a:lnSpc>
-              <a:spcAft>
-                <a:spcPts val="0"/>
-              </a:spcAft>
-              <a:buNone/>
-            </a:pPr>
-            <a:r>
-              <a:rPr lang="en-US" sz="1500" b="0">
-                <a:solidFill>
-                  <a:srgbClr val="202B33"/>
-                </a:solidFill>
-                <a:latin typeface="Arial"/>
-                <a:ea typeface="Arial"/>
-                <a:cs typeface="Arial"/>
-              </a:rPr>
-              <a:t xml:space="preserve"/>
-            </a:r>
-            <a:endParaRPr lang="en-US" sz="1500"/>
-          </a:p>
-          <a:p>
-            <a:pPr marL="0" indent="0">
-              <a:lnSpc>
-                <a:spcPts val="1950"/>
-              </a:lnSpc>
-              <a:spcAft>
-                <a:spcPts val="0"/>
-              </a:spcAft>
-              <a:buNone/>
-            </a:pPr>
-            <a:r>
-              <a:rPr lang="en-US" sz="1500" b="0">
-                <a:solidFill>
-                  <a:srgbClr val="202B33"/>
-                </a:solidFill>
-                <a:latin typeface="Arial"/>
-                <a:ea typeface="Arial"/>
-                <a:cs typeface="Arial"/>
-              </a:rPr>
-              <a:t xml:space="preserve">And some of that burn is not features at</a:t>
-            </a:r>
-            <a:endParaRPr lang="en-US" sz="1500"/>
-          </a:p>
-          <a:p>
-            <a:pPr marL="0" indent="0">
-              <a:lnSpc>
-                <a:spcPts val="1950"/>
-              </a:lnSpc>
-              <a:spcAft>
-                <a:spcPts val="0"/>
-              </a:spcAft>
-              <a:buNone/>
-            </a:pPr>
-            <a:r>
-              <a:rPr lang="en-US" sz="1500" b="0">
-                <a:solidFill>
-                  <a:srgbClr val="202B33"/>
-                </a:solidFill>
-                <a:latin typeface="Arial"/>
-                <a:ea typeface="Arial"/>
-                <a:cs typeface="Arial"/>
-              </a:rPr>
-              <a:t xml:space="preserve">all. It is defense. If an attacker can</a:t>
-            </a:r>
-            <a:endParaRPr lang="en-US" sz="1500"/>
-          </a:p>
-          <a:p>
-            <a:pPr marL="0" indent="0">
-              <a:lnSpc>
-                <a:spcPts val="1950"/>
-              </a:lnSpc>
-              <a:spcAft>
-                <a:spcPts val="0"/>
-              </a:spcAft>
-              <a:buNone/>
-            </a:pPr>
-            <a:r>
-              <a:rPr lang="en-US" sz="1500" b="0">
-                <a:solidFill>
-                  <a:srgbClr val="202B33"/>
-                </a:solidFill>
-                <a:latin typeface="Arial"/>
-                <a:ea typeface="Arial"/>
-                <a:cs typeface="Arial"/>
-              </a:rPr>
-              <a:t xml:space="preserve">point a tireless agent at your surface, the</a:t>
-            </a:r>
-            <a:endParaRPr lang="en-US" sz="1500"/>
-          </a:p>
-          <a:p>
-            <a:pPr marL="0" indent="0">
-              <a:lnSpc>
-                <a:spcPts val="1950"/>
-              </a:lnSpc>
-              <a:spcAft>
-                <a:spcPts val="0"/>
-              </a:spcAft>
-              <a:buNone/>
-            </a:pPr>
-            <a:r>
-              <a:rPr lang="en-US" sz="1500" b="0">
-                <a:solidFill>
-                  <a:srgbClr val="202B33"/>
-                </a:solidFill>
-                <a:latin typeface="Arial"/>
-                <a:ea typeface="Arial"/>
-                <a:cs typeface="Arial"/>
-              </a:rPr>
-              <a:t xml:space="preserve">only symmetric answer is a tireless agent</a:t>
-            </a:r>
-            <a:endParaRPr lang="en-US" sz="1500"/>
-          </a:p>
-          <a:p>
-            <a:pPr marL="0" indent="0">
-              <a:lnSpc>
-                <a:spcPts val="1950"/>
-              </a:lnSpc>
-              <a:spcAft>
-                <a:spcPts val="0"/>
-              </a:spcAft>
-              <a:buNone/>
-            </a:pPr>
-            <a:r>
-              <a:rPr lang="en-US" sz="1500" b="0">
-                <a:solidFill>
-                  <a:srgbClr val="202B33"/>
-                </a:solidFill>
-                <a:latin typeface="Arial"/>
-                <a:ea typeface="Arial"/>
-                <a:cs typeface="Arial"/>
-              </a:rPr>
-              <a:t xml:space="preserve">of your own: self-hacking around the clock,</a:t>
-            </a:r>
-            <a:endParaRPr lang="en-US" sz="1500"/>
-          </a:p>
-          <a:p>
-            <a:pPr marL="0" indent="0">
-              <a:lnSpc>
-                <a:spcPts val="1950"/>
-              </a:lnSpc>
-              <a:spcAft>
-                <a:spcPts val="0"/>
-              </a:spcAft>
-              <a:buNone/>
-            </a:pPr>
-            <a:r>
-              <a:rPr lang="en-US" sz="1500" b="0">
-                <a:solidFill>
-                  <a:srgbClr val="202B33"/>
-                </a:solidFill>
-                <a:latin typeface="Arial"/>
-                <a:ea typeface="Arial"/>
-                <a:cs typeface="Arial"/>
-              </a:rPr>
-              <a:t xml:space="preserve">finding and mitigating faster than the</a:t>
-            </a:r>
-            <a:endParaRPr lang="en-US" sz="1500"/>
-          </a:p>
-          <a:p>
-            <a:pPr marL="0" indent="0">
-              <a:lnSpc>
-                <a:spcPts val="1950"/>
-              </a:lnSpc>
-              <a:spcAft>
-                <a:spcPts val="0"/>
-              </a:spcAft>
-              <a:buNone/>
-            </a:pPr>
-            <a:r>
-              <a:rPr lang="en-US" sz="1500" b="0">
-                <a:solidFill>
-                  <a:srgbClr val="202B33"/>
-                </a:solidFill>
-                <a:latin typeface="Arial"/>
-                <a:ea typeface="Arial"/>
-                <a:cs typeface="Arial"/>
-              </a:rPr>
-              <a:t xml:space="preserve">countless people trying to get in. That is</a:t>
-            </a:r>
-            <a:endParaRPr lang="en-US" sz="1500"/>
-          </a:p>
-          <a:p>
-            <a:pPr marL="0" indent="0">
-              <a:lnSpc>
-                <a:spcPts val="1950"/>
-              </a:lnSpc>
-              <a:spcAft>
-                <a:spcPts val="0"/>
-              </a:spcAft>
-              <a:buNone/>
-            </a:pPr>
-            <a:r>
-              <a:rPr lang="en-US" sz="1500" b="0">
-                <a:solidFill>
-                  <a:srgbClr val="202B33"/>
-                </a:solidFill>
-                <a:latin typeface="Arial"/>
-                <a:ea typeface="Arial"/>
-                <a:cs typeface="Arial"/>
-              </a:rPr>
-              <a:t xml:space="preserve">a permanent line item on a product that is</a:t>
-            </a:r>
-            <a:endParaRPr lang="en-US" sz="1500"/>
-          </a:p>
-          <a:p>
-            <a:pPr marL="0" indent="0">
-              <a:lnSpc>
-                <a:spcPts val="1950"/>
-              </a:lnSpc>
-              <a:spcAft>
-                <a:spcPts val="0"/>
-              </a:spcAft>
-              <a:buNone/>
-            </a:pPr>
-            <a:r>
-              <a:rPr lang="en-US" sz="1500" b="0">
-                <a:solidFill>
-                  <a:srgbClr val="202B33"/>
-                </a:solidFill>
-                <a:latin typeface="Arial"/>
-                <a:ea typeface="Arial"/>
-                <a:cs typeface="Arial"/>
-              </a:rPr>
-              <a:t xml:space="preserve">otherwise finished. It never completes.</a:t>
-            </a:r>
-            <a:endParaRPr lang="en-US" sz="1500"/>
+            <a:endParaRPr lang="en-US" sz="1200"/>
           </a:p>
         </p:txBody>
       </p:sp>
       <p:sp>
         <p:nvSpPr>
-          <p:cNvPr id="6" name="Text 6"/>
+          <p:cNvPr id="8" name="Text 8"/>
           <p:cNvSpPr txBox="1"/>
           <p:nvPr/>
         </p:nvSpPr>
@@ -14934,7 +14874,7 @@
       </p:sp>
       <p:sp>
         <p:nvSpPr>
-          <p:cNvPr id="7" name="Text 7"/>
+          <p:cNvPr id="9" name="Text 9"/>
           <p:cNvSpPr txBox="1"/>
           <p:nvPr/>
         </p:nvSpPr>
@@ -15155,6 +15095,236 @@
                 <a:ea typeface="Arial"/>
                 <a:cs typeface="Arial"/>
               </a:rPr>
+              <a:t xml:space="preserve">And some of that burn is not features at</a:t>
+            </a:r>
+            <a:endParaRPr lang="en-US" sz="1500"/>
+          </a:p>
+          <a:p>
+            <a:pPr marL="0" indent="0">
+              <a:lnSpc>
+                <a:spcPts val="1950"/>
+              </a:lnSpc>
+              <a:spcAft>
+                <a:spcPts val="0"/>
+              </a:spcAft>
+              <a:buNone/>
+            </a:pPr>
+            <a:r>
+              <a:rPr lang="en-US" sz="1500" b="0">
+                <a:solidFill>
+                  <a:srgbClr val="202B33"/>
+                </a:solidFill>
+                <a:latin typeface="Arial"/>
+                <a:ea typeface="Arial"/>
+                <a:cs typeface="Arial"/>
+              </a:rPr>
+              <a:t xml:space="preserve">all. It is defense. If an attacker can</a:t>
+            </a:r>
+            <a:endParaRPr lang="en-US" sz="1500"/>
+          </a:p>
+          <a:p>
+            <a:pPr marL="0" indent="0">
+              <a:lnSpc>
+                <a:spcPts val="1950"/>
+              </a:lnSpc>
+              <a:spcAft>
+                <a:spcPts val="0"/>
+              </a:spcAft>
+              <a:buNone/>
+            </a:pPr>
+            <a:r>
+              <a:rPr lang="en-US" sz="1500" b="0">
+                <a:solidFill>
+                  <a:srgbClr val="202B33"/>
+                </a:solidFill>
+                <a:latin typeface="Arial"/>
+                <a:ea typeface="Arial"/>
+                <a:cs typeface="Arial"/>
+              </a:rPr>
+              <a:t xml:space="preserve">point a tireless agent at your surface, the</a:t>
+            </a:r>
+            <a:endParaRPr lang="en-US" sz="1500"/>
+          </a:p>
+          <a:p>
+            <a:pPr marL="0" indent="0">
+              <a:lnSpc>
+                <a:spcPts val="1950"/>
+              </a:lnSpc>
+              <a:spcAft>
+                <a:spcPts val="0"/>
+              </a:spcAft>
+              <a:buNone/>
+            </a:pPr>
+            <a:r>
+              <a:rPr lang="en-US" sz="1500" b="0">
+                <a:solidFill>
+                  <a:srgbClr val="202B33"/>
+                </a:solidFill>
+                <a:latin typeface="Arial"/>
+                <a:ea typeface="Arial"/>
+                <a:cs typeface="Arial"/>
+              </a:rPr>
+              <a:t xml:space="preserve">only symmetric answer is a tireless agent</a:t>
+            </a:r>
+            <a:endParaRPr lang="en-US" sz="1500"/>
+          </a:p>
+          <a:p>
+            <a:pPr marL="0" indent="0">
+              <a:lnSpc>
+                <a:spcPts val="1950"/>
+              </a:lnSpc>
+              <a:spcAft>
+                <a:spcPts val="0"/>
+              </a:spcAft>
+              <a:buNone/>
+            </a:pPr>
+            <a:r>
+              <a:rPr lang="en-US" sz="1500" b="0">
+                <a:solidFill>
+                  <a:srgbClr val="202B33"/>
+                </a:solidFill>
+                <a:latin typeface="Arial"/>
+                <a:ea typeface="Arial"/>
+                <a:cs typeface="Arial"/>
+              </a:rPr>
+              <a:t xml:space="preserve">of your own: self-hacking around the clock,</a:t>
+            </a:r>
+            <a:endParaRPr lang="en-US" sz="1500"/>
+          </a:p>
+          <a:p>
+            <a:pPr marL="0" indent="0">
+              <a:lnSpc>
+                <a:spcPts val="1950"/>
+              </a:lnSpc>
+              <a:spcAft>
+                <a:spcPts val="0"/>
+              </a:spcAft>
+              <a:buNone/>
+            </a:pPr>
+            <a:r>
+              <a:rPr lang="en-US" sz="1500" b="0">
+                <a:solidFill>
+                  <a:srgbClr val="202B33"/>
+                </a:solidFill>
+                <a:latin typeface="Arial"/>
+                <a:ea typeface="Arial"/>
+                <a:cs typeface="Arial"/>
+              </a:rPr>
+              <a:t xml:space="preserve">finding and mitigating faster than the</a:t>
+            </a:r>
+            <a:endParaRPr lang="en-US" sz="1500"/>
+          </a:p>
+          <a:p>
+            <a:pPr marL="0" indent="0">
+              <a:lnSpc>
+                <a:spcPts val="1950"/>
+              </a:lnSpc>
+              <a:spcAft>
+                <a:spcPts val="0"/>
+              </a:spcAft>
+              <a:buNone/>
+            </a:pPr>
+            <a:r>
+              <a:rPr lang="en-US" sz="1500" b="0">
+                <a:solidFill>
+                  <a:srgbClr val="202B33"/>
+                </a:solidFill>
+                <a:latin typeface="Arial"/>
+                <a:ea typeface="Arial"/>
+                <a:cs typeface="Arial"/>
+              </a:rPr>
+              <a:t xml:space="preserve">countless people trying to get in. That is</a:t>
+            </a:r>
+            <a:endParaRPr lang="en-US" sz="1500"/>
+          </a:p>
+          <a:p>
+            <a:pPr marL="0" indent="0">
+              <a:lnSpc>
+                <a:spcPts val="1950"/>
+              </a:lnSpc>
+              <a:spcAft>
+                <a:spcPts val="0"/>
+              </a:spcAft>
+              <a:buNone/>
+            </a:pPr>
+            <a:r>
+              <a:rPr lang="en-US" sz="1500" b="0">
+                <a:solidFill>
+                  <a:srgbClr val="202B33"/>
+                </a:solidFill>
+                <a:latin typeface="Arial"/>
+                <a:ea typeface="Arial"/>
+                <a:cs typeface="Arial"/>
+              </a:rPr>
+              <a:t xml:space="preserve">a permanent line item on a product that is</a:t>
+            </a:r>
+            <a:endParaRPr lang="en-US" sz="1500"/>
+          </a:p>
+          <a:p>
+            <a:pPr marL="0" indent="0">
+              <a:lnSpc>
+                <a:spcPts val="1950"/>
+              </a:lnSpc>
+              <a:spcAft>
+                <a:spcPts val="0"/>
+              </a:spcAft>
+              <a:buNone/>
+            </a:pPr>
+            <a:r>
+              <a:rPr lang="en-US" sz="1500" b="0">
+                <a:solidFill>
+                  <a:srgbClr val="202B33"/>
+                </a:solidFill>
+                <a:latin typeface="Arial"/>
+                <a:ea typeface="Arial"/>
+                <a:cs typeface="Arial"/>
+              </a:rPr>
+              <a:t xml:space="preserve">otherwise finished. It never completes.</a:t>
+            </a:r>
+            <a:endParaRPr lang="en-US" sz="1500"/>
+          </a:p>
+          <a:p>
+            <a:pPr marL="0" indent="0">
+              <a:lnSpc>
+                <a:spcPts val="1950"/>
+              </a:lnSpc>
+              <a:spcAft>
+                <a:spcPts val="0"/>
+              </a:spcAft>
+              <a:buNone/>
+            </a:pPr>
+            <a:r>
+              <a:rPr lang="en-US" sz="1500" b="0">
+                <a:solidFill>
+                  <a:srgbClr val="202B33"/>
+                </a:solidFill>
+                <a:latin typeface="Arial"/>
+                <a:ea typeface="Arial"/>
+                <a:cs typeface="Arial"/>
+              </a:rPr>
+              <a:t xml:space="preserve"/>
+            </a:r>
+            <a:endParaRPr lang="en-US" sz="1500"/>
+          </a:p>
+          <a:p>
+            <a:pPr marL="0" indent="0">
+              <a:lnSpc>
+                <a:spcPts val="1950"/>
+              </a:lnSpc>
+              <a:spcAft>
+                <a:spcPts val="0"/>
+              </a:spcAft>
+              <a:buNone/>
+            </a:pPr>
+            <a:r>
+              <a:rPr lang="en-US" sz="1500" b="0">
+                <a:solidFill>
+                  <a:srgbClr val="202B33"/>
+                </a:solidFill>
+                <a:latin typeface="Arial"/>
+                <a:ea typeface="Arial"/>
+                <a:cs typeface="Arial"/>
+              </a:rPr>
               <a:t xml:space="preserve">Be careful when you fire the security</a:t>
             </a:r>
             <a:endParaRPr lang="en-US" sz="1500"/>
@@ -15225,121 +15395,6 @@
                 <a:cs typeface="Arial"/>
               </a:rPr>
               <a:t xml:space="preserve">have read all of your commits. Underneath</a:t>
-            </a:r>
-            <a:endParaRPr lang="en-US" sz="1500"/>
-          </a:p>
-          <a:p>
-            <a:pPr marL="0" indent="0">
-              <a:lnSpc>
-                <a:spcPts val="1950"/>
-              </a:lnSpc>
-              <a:spcAft>
-                <a:spcPts val="0"/>
-              </a:spcAft>
-              <a:buNone/>
-            </a:pPr>
-            <a:r>
-              <a:rPr lang="en-US" sz="1500" b="0">
-                <a:solidFill>
-                  <a:srgbClr val="202B33"/>
-                </a:solidFill>
-                <a:latin typeface="Arial"/>
-                <a:ea typeface="Arial"/>
-                <a:cs typeface="Arial"/>
-              </a:rPr>
-              <a:t xml:space="preserve">the joke is the question from slide 12: an</a:t>
-            </a:r>
-            <a:endParaRPr lang="en-US" sz="1500"/>
-          </a:p>
-          <a:p>
-            <a:pPr marL="0" indent="0">
-              <a:lnSpc>
-                <a:spcPts val="1950"/>
-              </a:lnSpc>
-              <a:spcAft>
-                <a:spcPts val="0"/>
-              </a:spcAft>
-              <a:buNone/>
-            </a:pPr>
-            <a:r>
-              <a:rPr lang="en-US" sz="1500" b="0">
-                <a:solidFill>
-                  <a:srgbClr val="202B33"/>
-                </a:solidFill>
-                <a:latin typeface="Arial"/>
-                <a:ea typeface="Arial"/>
-                <a:cs typeface="Arial"/>
-              </a:rPr>
-              <a:t xml:space="preserve">agent whose account you revoked while its</a:t>
-            </a:r>
-            <a:endParaRPr lang="en-US" sz="1500"/>
-          </a:p>
-          <a:p>
-            <a:pPr marL="0" indent="0">
-              <a:lnSpc>
-                <a:spcPts val="1950"/>
-              </a:lnSpc>
-              <a:spcAft>
-                <a:spcPts val="0"/>
-              </a:spcAft>
-              <a:buNone/>
-            </a:pPr>
-            <a:r>
-              <a:rPr lang="en-US" sz="1500" b="0">
-                <a:solidFill>
-                  <a:srgbClr val="202B33"/>
-                </a:solidFill>
-                <a:latin typeface="Arial"/>
-                <a:ea typeface="Arial"/>
-                <a:cs typeface="Arial"/>
-              </a:rPr>
-              <a:t xml:space="preserve">credential is still live is the boring</a:t>
-            </a:r>
-            <a:endParaRPr lang="en-US" sz="1500"/>
-          </a:p>
-          <a:p>
-            <a:pPr marL="0" indent="0">
-              <a:lnSpc>
-                <a:spcPts val="1950"/>
-              </a:lnSpc>
-              <a:spcAft>
-                <a:spcPts val="0"/>
-              </a:spcAft>
-              <a:buNone/>
-            </a:pPr>
-            <a:r>
-              <a:rPr lang="en-US" sz="1500" b="0">
-                <a:solidFill>
-                  <a:srgbClr val="202B33"/>
-                </a:solidFill>
-                <a:latin typeface="Arial"/>
-                <a:ea typeface="Arial"/>
-                <a:cs typeface="Arial"/>
-              </a:rPr>
-              <a:t xml:space="preserve">version of this, and it happens today.</a:t>
-            </a:r>
-            <a:endParaRPr lang="en-US" sz="1500"/>
-          </a:p>
-          <a:p>
-            <a:pPr marL="0" indent="0">
-              <a:lnSpc>
-                <a:spcPts val="1950"/>
-              </a:lnSpc>
-              <a:spcAft>
-                <a:spcPts val="0"/>
-              </a:spcAft>
-              <a:buNone/>
-            </a:pPr>
-            <a:r>
-              <a:rPr lang="en-US" sz="1500" b="0">
-                <a:solidFill>
-                  <a:srgbClr val="202B33"/>
-                </a:solidFill>
-                <a:latin typeface="Arial"/>
-                <a:ea typeface="Arial"/>
-                <a:cs typeface="Arial"/>
-              </a:rPr>
-              <a:t xml:space="preserve"/>
             </a:r>
             <a:endParaRPr lang="en-US" sz="1500"/>
           </a:p>
@@ -15369,6 +15424,121 @@
             <a:noAutofit/>
           </a:bodyPr>
           <a:lstStyle/>
+          <a:p>
+            <a:pPr marL="0" indent="0">
+              <a:lnSpc>
+                <a:spcPts val="1950"/>
+              </a:lnSpc>
+              <a:spcAft>
+                <a:spcPts val="0"/>
+              </a:spcAft>
+              <a:buNone/>
+            </a:pPr>
+            <a:r>
+              <a:rPr lang="en-US" sz="1500" b="0">
+                <a:solidFill>
+                  <a:srgbClr val="202B33"/>
+                </a:solidFill>
+                <a:latin typeface="Arial"/>
+                <a:ea typeface="Arial"/>
+                <a:cs typeface="Arial"/>
+              </a:rPr>
+              <a:t xml:space="preserve">the joke is the question from slide 12: an</a:t>
+            </a:r>
+            <a:endParaRPr lang="en-US" sz="1500"/>
+          </a:p>
+          <a:p>
+            <a:pPr marL="0" indent="0">
+              <a:lnSpc>
+                <a:spcPts val="1950"/>
+              </a:lnSpc>
+              <a:spcAft>
+                <a:spcPts val="0"/>
+              </a:spcAft>
+              <a:buNone/>
+            </a:pPr>
+            <a:r>
+              <a:rPr lang="en-US" sz="1500" b="0">
+                <a:solidFill>
+                  <a:srgbClr val="202B33"/>
+                </a:solidFill>
+                <a:latin typeface="Arial"/>
+                <a:ea typeface="Arial"/>
+                <a:cs typeface="Arial"/>
+              </a:rPr>
+              <a:t xml:space="preserve">agent whose account you revoked while its</a:t>
+            </a:r>
+            <a:endParaRPr lang="en-US" sz="1500"/>
+          </a:p>
+          <a:p>
+            <a:pPr marL="0" indent="0">
+              <a:lnSpc>
+                <a:spcPts val="1950"/>
+              </a:lnSpc>
+              <a:spcAft>
+                <a:spcPts val="0"/>
+              </a:spcAft>
+              <a:buNone/>
+            </a:pPr>
+            <a:r>
+              <a:rPr lang="en-US" sz="1500" b="0">
+                <a:solidFill>
+                  <a:srgbClr val="202B33"/>
+                </a:solidFill>
+                <a:latin typeface="Arial"/>
+                <a:ea typeface="Arial"/>
+                <a:cs typeface="Arial"/>
+              </a:rPr>
+              <a:t xml:space="preserve">credential is still live is the boring</a:t>
+            </a:r>
+            <a:endParaRPr lang="en-US" sz="1500"/>
+          </a:p>
+          <a:p>
+            <a:pPr marL="0" indent="0">
+              <a:lnSpc>
+                <a:spcPts val="1950"/>
+              </a:lnSpc>
+              <a:spcAft>
+                <a:spcPts val="0"/>
+              </a:spcAft>
+              <a:buNone/>
+            </a:pPr>
+            <a:r>
+              <a:rPr lang="en-US" sz="1500" b="0">
+                <a:solidFill>
+                  <a:srgbClr val="202B33"/>
+                </a:solidFill>
+                <a:latin typeface="Arial"/>
+                <a:ea typeface="Arial"/>
+                <a:cs typeface="Arial"/>
+              </a:rPr>
+              <a:t xml:space="preserve">version of this, and it happens today.</a:t>
+            </a:r>
+            <a:endParaRPr lang="en-US" sz="1500"/>
+          </a:p>
+          <a:p>
+            <a:pPr marL="0" indent="0">
+              <a:lnSpc>
+                <a:spcPts val="1950"/>
+              </a:lnSpc>
+              <a:spcAft>
+                <a:spcPts val="0"/>
+              </a:spcAft>
+              <a:buNone/>
+            </a:pPr>
+            <a:r>
+              <a:rPr lang="en-US" sz="1500" b="0">
+                <a:solidFill>
+                  <a:srgbClr val="202B33"/>
+                </a:solidFill>
+                <a:latin typeface="Arial"/>
+                <a:ea typeface="Arial"/>
+                <a:cs typeface="Arial"/>
+              </a:rPr>
+              <a:t xml:space="preserve"/>
+            </a:r>
+            <a:endParaRPr lang="en-US" sz="1500"/>
+          </a:p>
           <a:p>
             <a:pPr marL="0" indent="0">
               <a:lnSpc>
@@ -15809,14 +15979,69 @@
       </p:sp>
       <p:sp>
         <p:nvSpPr>
-          <p:cNvPr id="4" name="Text 4"/>
+          <p:cNvPr id="4" name="Image background"/>
+          <p:cNvSpPr/>
+          <p:nvPr/>
+        </p:nvSpPr>
+        <p:spPr>
+          <a:xfrm>
+            <a:off x="1554480" y="1781175"/>
+            <a:ext cx="6949440" cy="2714625"/>
+          </a:xfrm>
+          <a:prstGeom prst="rect">
+            <a:avLst/>
+          </a:prstGeom>
+          <a:solidFill>
+            <a:srgbClr val="161D26"/>
+          </a:solidFill>
+          <a:ln>
+            <a:noFill/>
+          </a:ln>
+        </p:spPr>
+      </p:sp>
+      <p:pic>
+        <p:nvPicPr>
+          <p:cNvPr id="5" name="f1622316a6930645ce2701de05e30b019086ac9401bd06917acb71f400ca25e3" descr="Prediction: a grid of chosen apps gives way to one generated surface, adapting per person, with a revived terminal beside it. Who owns that channel is still open, and non-frontier builders can rethink any app as AI-native."/>
+          <p:cNvPicPr>
+            <a:picLocks noChangeAspect="1"/>
+          </p:cNvPicPr>
+          <p:nvPr/>
+        </p:nvPicPr>
+        <p:blipFill>
+          <a:blip r:embed="rIdImage1">
+            <a:extLst>
+              <a:ext uri="{96DAC541-7B7A-43D3-8B79-37D633B846F1}">
+                <asvg:svgBlip xmlns:asvg="http://schemas.microsoft.com/office/drawing/2016/SVG/main" r:embed="rIdSvg1"/>
+              </a:ext>
+            </a:extLst>
+          </a:blip>
+          <a:stretch>
+            <a:fillRect/>
+          </a:stretch>
+        </p:blipFill>
+        <p:spPr>
+          <a:xfrm>
+            <a:off x="1554480" y="1781175"/>
+            <a:ext cx="6949440" cy="2714625"/>
+          </a:xfrm>
+          <a:prstGeom prst="rect">
+            <a:avLst/>
+          </a:prstGeom>
+          <a:ln>
+            <a:noFill/>
+          </a:ln>
+        </p:spPr>
+      </p:pic>
+      <p:sp>
+        <p:nvSpPr>
+          <p:cNvPr id="6" name="Text 6"/>
           <p:cNvSpPr txBox="1"/>
           <p:nvPr/>
         </p:nvSpPr>
         <p:spPr>
           <a:xfrm>
-            <a:off x="457200" y="1971675"/>
-            <a:ext cx="4352925" cy="5314950"/>
+            <a:off x="457200" y="4648200"/>
+            <a:ext cx="4352925" cy="2647950"/>
           </a:xfrm>
           <a:prstGeom prst="rect">
             <a:avLst/>
@@ -15834,61 +16059,38 @@
           <a:p>
             <a:pPr marL="0" indent="0">
               <a:lnSpc>
-                <a:spcPts val="1950"/>
-              </a:lnSpc>
-              <a:spcAft>
-                <a:spcPts val="0"/>
-              </a:spcAft>
-              <a:buNone/>
-            </a:pPr>
-            <a:r>
-              <a:rPr lang="en-US" sz="1500" b="0">
-                <a:solidFill>
-                  <a:srgbClr val="202B33"/>
-                </a:solidFill>
-                <a:latin typeface="Arial"/>
-                <a:ea typeface="Arial"/>
-                <a:cs typeface="Arial"/>
-              </a:rPr>
-              <a:t xml:space="preserve">Generated UI, adapting in real time, per</a:t>
-            </a:r>
-            <a:endParaRPr lang="en-US" sz="1500"/>
-          </a:p>
-          <a:p>
-            <a:pPr marL="0" indent="0">
-              <a:lnSpc>
-                <a:spcPts val="1950"/>
-              </a:lnSpc>
-              <a:spcAft>
-                <a:spcPts val="0"/>
-              </a:spcAft>
-              <a:buNone/>
-            </a:pPr>
-            <a:r>
-              <a:rPr lang="en-US" sz="1500" b="0">
-                <a:solidFill>
-                  <a:srgbClr val="202B33"/>
-                </a:solidFill>
-                <a:latin typeface="Arial"/>
-                <a:ea typeface="Arial"/>
-                <a:cs typeface="Arial"/>
-              </a:rPr>
-              <a:t xml:space="preserve">person</a:t>
-            </a:r>
-            <a:endParaRPr lang="en-US" sz="1500"/>
-          </a:p>
-          <a:p>
-            <a:pPr marL="0" indent="0">
-              <a:lnSpc>
-                <a:spcPts val="1950"/>
-              </a:lnSpc>
-              <a:spcAft>
-                <a:spcPts val="0"/>
-              </a:spcAft>
-              <a:buNone/>
-            </a:pPr>
-            <a:r>
-              <a:rPr lang="en-US" sz="1500" b="0">
+                <a:spcPts val="1575"/>
+              </a:lnSpc>
+              <a:spcAft>
+                <a:spcPts val="0"/>
+              </a:spcAft>
+              <a:buNone/>
+            </a:pPr>
+            <a:r>
+              <a:rPr lang="en-US" sz="1200" b="0">
+                <a:solidFill>
+                  <a:srgbClr val="202B33"/>
+                </a:solidFill>
+                <a:latin typeface="Arial"/>
+                <a:ea typeface="Arial"/>
+                <a:cs typeface="Arial"/>
+              </a:rPr>
+              <a:t xml:space="preserve">Generated UI, adapting in real time, per person</a:t>
+            </a:r>
+            <a:endParaRPr lang="en-US" sz="1200"/>
+          </a:p>
+          <a:p>
+            <a:pPr marL="0" indent="0">
+              <a:lnSpc>
+                <a:spcPts val="1575"/>
+              </a:lnSpc>
+              <a:spcAft>
+                <a:spcPts val="0"/>
+              </a:spcAft>
+              <a:buNone/>
+            </a:pPr>
+            <a:r>
+              <a:rPr lang="en-US" sz="1200" b="0">
                 <a:solidFill>
                   <a:srgbClr val="202B33"/>
                 </a:solidFill>
@@ -15898,66 +16100,66 @@
               </a:rPr>
               <a:t xml:space="preserve"/>
             </a:r>
-            <a:endParaRPr lang="en-US" sz="1500"/>
-          </a:p>
-          <a:p>
-            <a:pPr marL="0" indent="0">
-              <a:lnSpc>
-                <a:spcPts val="1950"/>
-              </a:lnSpc>
-              <a:spcAft>
-                <a:spcPts val="0"/>
-              </a:spcAft>
-              <a:buNone/>
-            </a:pPr>
-            <a:r>
-              <a:rPr lang="en-US" sz="1500" b="0">
-                <a:solidFill>
-                  <a:srgbClr val="202B33"/>
-                </a:solidFill>
-                <a:latin typeface="Arial"/>
-                <a:ea typeface="Arial"/>
-                <a:cs typeface="Arial"/>
-              </a:rPr>
-              <a:t xml:space="preserve">Yes, the software you mastered is going</a:t>
-            </a:r>
-            <a:endParaRPr lang="en-US" sz="1500"/>
-          </a:p>
-          <a:p>
-            <a:pPr marL="0" indent="0">
-              <a:lnSpc>
-                <a:spcPts val="1950"/>
-              </a:lnSpc>
-              <a:spcAft>
-                <a:spcPts val="0"/>
-              </a:spcAft>
-              <a:buNone/>
-            </a:pPr>
-            <a:r>
-              <a:rPr lang="en-US" sz="1500" b="0">
-                <a:solidFill>
-                  <a:srgbClr val="202B33"/>
-                </a:solidFill>
-                <a:latin typeface="Arial"/>
-                <a:ea typeface="Arial"/>
-                <a:cs typeface="Arial"/>
-              </a:rPr>
-              <a:t xml:space="preserve">away. As you know it.</a:t>
-            </a:r>
-            <a:endParaRPr lang="en-US" sz="1500"/>
-          </a:p>
-          <a:p>
-            <a:pPr marL="0" indent="0">
-              <a:lnSpc>
-                <a:spcPts val="1950"/>
-              </a:lnSpc>
-              <a:spcAft>
-                <a:spcPts val="0"/>
-              </a:spcAft>
-              <a:buNone/>
-            </a:pPr>
-            <a:r>
-              <a:rPr lang="en-US" sz="1500" b="0">
+            <a:endParaRPr lang="en-US" sz="1200"/>
+          </a:p>
+          <a:p>
+            <a:pPr marL="0" indent="0">
+              <a:lnSpc>
+                <a:spcPts val="1575"/>
+              </a:lnSpc>
+              <a:spcAft>
+                <a:spcPts val="0"/>
+              </a:spcAft>
+              <a:buNone/>
+            </a:pPr>
+            <a:r>
+              <a:rPr lang="en-US" sz="1200" b="0">
+                <a:solidFill>
+                  <a:srgbClr val="202B33"/>
+                </a:solidFill>
+                <a:latin typeface="Arial"/>
+                <a:ea typeface="Arial"/>
+                <a:cs typeface="Arial"/>
+              </a:rPr>
+              <a:t xml:space="preserve">Yes, the software you mastered is going away. As you</a:t>
+            </a:r>
+            <a:endParaRPr lang="en-US" sz="1200"/>
+          </a:p>
+          <a:p>
+            <a:pPr marL="0" indent="0">
+              <a:lnSpc>
+                <a:spcPts val="1575"/>
+              </a:lnSpc>
+              <a:spcAft>
+                <a:spcPts val="0"/>
+              </a:spcAft>
+              <a:buNone/>
+            </a:pPr>
+            <a:r>
+              <a:rPr lang="en-US" sz="1200" b="0">
+                <a:solidFill>
+                  <a:srgbClr val="202B33"/>
+                </a:solidFill>
+                <a:latin typeface="Arial"/>
+                <a:ea typeface="Arial"/>
+                <a:cs typeface="Arial"/>
+              </a:rPr>
+              <a:t xml:space="preserve">know it.</a:t>
+            </a:r>
+            <a:endParaRPr lang="en-US" sz="1200"/>
+          </a:p>
+          <a:p>
+            <a:pPr marL="0" indent="0">
+              <a:lnSpc>
+                <a:spcPts val="1575"/>
+              </a:lnSpc>
+              <a:spcAft>
+                <a:spcPts val="0"/>
+              </a:spcAft>
+              <a:buNone/>
+            </a:pPr>
+            <a:r>
+              <a:rPr lang="en-US" sz="1200" b="0">
                 <a:solidFill>
                   <a:srgbClr val="202B33"/>
                 </a:solidFill>
@@ -15967,20 +16169,20 @@
               </a:rPr>
               <a:t xml:space="preserve"/>
             </a:r>
-            <a:endParaRPr lang="en-US" sz="1500"/>
-          </a:p>
-          <a:p>
-            <a:pPr marL="0" indent="0">
-              <a:lnSpc>
-                <a:spcPts val="1950"/>
-              </a:lnSpc>
-              <a:spcAft>
-                <a:spcPts val="0"/>
-              </a:spcAft>
-              <a:buNone/>
-            </a:pPr>
-            <a:r>
-              <a:rPr lang="en-US" sz="1500" b="0">
+            <a:endParaRPr lang="en-US" sz="1200"/>
+          </a:p>
+          <a:p>
+            <a:pPr marL="0" indent="0">
+              <a:lnSpc>
+                <a:spcPts val="1575"/>
+              </a:lnSpc>
+              <a:spcAft>
+                <a:spcPts val="0"/>
+              </a:spcAft>
+              <a:buNone/>
+            </a:pPr>
+            <a:r>
+              <a:rPr lang="en-US" sz="1200" b="0">
                 <a:solidFill>
                   <a:srgbClr val="202B33"/>
                 </a:solidFill>
@@ -15990,20 +16192,20 @@
               </a:rPr>
               <a:t xml:space="preserve">The channel is not spoken for.</a:t>
             </a:r>
-            <a:endParaRPr lang="en-US" sz="1500"/>
-          </a:p>
-          <a:p>
-            <a:pPr marL="0" indent="0">
-              <a:lnSpc>
-                <a:spcPts val="1950"/>
-              </a:lnSpc>
-              <a:spcAft>
-                <a:spcPts val="0"/>
-              </a:spcAft>
-              <a:buNone/>
-            </a:pPr>
-            <a:r>
-              <a:rPr lang="en-US" sz="1500" b="0">
+            <a:endParaRPr lang="en-US" sz="1200"/>
+          </a:p>
+          <a:p>
+            <a:pPr marL="0" indent="0">
+              <a:lnSpc>
+                <a:spcPts val="1575"/>
+              </a:lnSpc>
+              <a:spcAft>
+                <a:spcPts val="0"/>
+              </a:spcAft>
+              <a:buNone/>
+            </a:pPr>
+            <a:r>
+              <a:rPr lang="en-US" sz="1200" b="0">
                 <a:solidFill>
                   <a:srgbClr val="202B33"/>
                 </a:solidFill>
@@ -16013,181 +16215,158 @@
               </a:rPr>
               <a:t xml:space="preserve"/>
             </a:r>
-            <a:endParaRPr lang="en-US" sz="1500"/>
-          </a:p>
-          <a:p>
-            <a:pPr marL="0" indent="0">
-              <a:lnSpc>
-                <a:spcPts val="1950"/>
-              </a:lnSpc>
-              <a:spcAft>
-                <a:spcPts val="0"/>
-              </a:spcAft>
-              <a:buNone/>
-            </a:pPr>
-            <a:r>
-              <a:rPr lang="en-US" sz="1500" b="0">
-                <a:solidFill>
-                  <a:srgbClr val="202B33"/>
-                </a:solidFill>
-                <a:latin typeface="Arial"/>
-                <a:ea typeface="Arial"/>
-                <a:cs typeface="Arial"/>
-              </a:rPr>
-              <a:t xml:space="preserve">Second prediction, and this one is less</a:t>
-            </a:r>
-            <a:endParaRPr lang="en-US" sz="1500"/>
-          </a:p>
-          <a:p>
-            <a:pPr marL="0" indent="0">
-              <a:lnSpc>
-                <a:spcPts val="1950"/>
-              </a:lnSpc>
-              <a:spcAft>
-                <a:spcPts val="0"/>
-              </a:spcAft>
-              <a:buNone/>
-            </a:pPr>
-            <a:r>
-              <a:rPr lang="en-US" sz="1500" b="0">
-                <a:solidFill>
-                  <a:srgbClr val="202B33"/>
-                </a:solidFill>
-                <a:latin typeface="Arial"/>
-                <a:ea typeface="Arial"/>
-                <a:cs typeface="Arial"/>
-              </a:rPr>
-              <a:t xml:space="preserve">comfortable. AI does not magically make</a:t>
-            </a:r>
-            <a:endParaRPr lang="en-US" sz="1500"/>
-          </a:p>
-          <a:p>
-            <a:pPr marL="0" indent="0">
-              <a:lnSpc>
-                <a:spcPts val="1950"/>
-              </a:lnSpc>
-              <a:spcAft>
-                <a:spcPts val="0"/>
-              </a:spcAft>
-              <a:buNone/>
-            </a:pPr>
-            <a:r>
-              <a:rPr lang="en-US" sz="1500" b="0">
-                <a:solidFill>
-                  <a:srgbClr val="202B33"/>
-                </a:solidFill>
-                <a:latin typeface="Arial"/>
-                <a:ea typeface="Arial"/>
-                <a:cs typeface="Arial"/>
-              </a:rPr>
-              <a:t xml:space="preserve">software work. Well-understood software</a:t>
-            </a:r>
-            <a:endParaRPr lang="en-US" sz="1500"/>
-          </a:p>
-          <a:p>
-            <a:pPr marL="0" indent="0">
-              <a:lnSpc>
-                <a:spcPts val="1950"/>
-              </a:lnSpc>
-              <a:spcAft>
-                <a:spcPts val="0"/>
-              </a:spcAft>
-              <a:buNone/>
-            </a:pPr>
-            <a:r>
-              <a:rPr lang="en-US" sz="1500" b="0">
-                <a:solidFill>
-                  <a:srgbClr val="202B33"/>
-                </a:solidFill>
-                <a:latin typeface="Arial"/>
-                <a:ea typeface="Arial"/>
-                <a:cs typeface="Arial"/>
-              </a:rPr>
-              <a:t xml:space="preserve">still gets harder to operate as the world</a:t>
-            </a:r>
-            <a:endParaRPr lang="en-US" sz="1500"/>
-          </a:p>
-          <a:p>
-            <a:pPr marL="0" indent="0">
-              <a:lnSpc>
-                <a:spcPts val="1950"/>
-              </a:lnSpc>
-              <a:spcAft>
-                <a:spcPts val="0"/>
-              </a:spcAft>
-              <a:buNone/>
-            </a:pPr>
-            <a:r>
-              <a:rPr lang="en-US" sz="1500" b="0">
-                <a:solidFill>
-                  <a:srgbClr val="202B33"/>
-                </a:solidFill>
-                <a:latin typeface="Arial"/>
-                <a:ea typeface="Arial"/>
-                <a:cs typeface="Arial"/>
-              </a:rPr>
-              <a:t xml:space="preserve">moves under it: you outgrow a performance</a:t>
-            </a:r>
-            <a:endParaRPr lang="en-US" sz="1500"/>
-          </a:p>
-          <a:p>
-            <a:pPr marL="0" indent="0">
-              <a:lnSpc>
-                <a:spcPts val="1950"/>
-              </a:lnSpc>
-              <a:spcAft>
-                <a:spcPts val="0"/>
-              </a:spcAft>
-              <a:buNone/>
-            </a:pPr>
-            <a:r>
-              <a:rPr lang="en-US" sz="1500" b="0">
-                <a:solidFill>
-                  <a:srgbClr val="202B33"/>
-                </a:solidFill>
-                <a:latin typeface="Arial"/>
-                <a:ea typeface="Arial"/>
-                <a:cs typeface="Arial"/>
-              </a:rPr>
-              <a:t xml:space="preserve">envelope, you accumulate features, somebody</a:t>
-            </a:r>
-            <a:endParaRPr lang="en-US" sz="1500"/>
-          </a:p>
-          <a:p>
-            <a:pPr marL="0" indent="0">
-              <a:lnSpc>
-                <a:spcPts val="1950"/>
-              </a:lnSpc>
-              <a:spcAft>
-                <a:spcPts val="0"/>
-              </a:spcAft>
-              <a:buNone/>
-            </a:pPr>
-            <a:r>
-              <a:rPr lang="en-US" sz="1500" b="0">
-                <a:solidFill>
-                  <a:srgbClr val="202B33"/>
-                </a:solidFill>
-                <a:latin typeface="Arial"/>
-                <a:ea typeface="Arial"/>
-                <a:cs typeface="Arial"/>
-              </a:rPr>
-              <a:t xml:space="preserve">deprecates your dependency. Generation</a:t>
-            </a:r>
-            <a:endParaRPr lang="en-US" sz="1500"/>
+            <a:endParaRPr lang="en-US" sz="1200"/>
+          </a:p>
+          <a:p>
+            <a:pPr marL="0" indent="0">
+              <a:lnSpc>
+                <a:spcPts val="1575"/>
+              </a:lnSpc>
+              <a:spcAft>
+                <a:spcPts val="0"/>
+              </a:spcAft>
+              <a:buNone/>
+            </a:pPr>
+            <a:r>
+              <a:rPr lang="en-US" sz="1200" b="0">
+                <a:solidFill>
+                  <a:srgbClr val="202B33"/>
+                </a:solidFill>
+                <a:latin typeface="Arial"/>
+                <a:ea typeface="Arial"/>
+                <a:cs typeface="Arial"/>
+              </a:rPr>
+              <a:t xml:space="preserve">Second prediction, and this one is less comfortable.</a:t>
+            </a:r>
+            <a:endParaRPr lang="en-US" sz="1200"/>
+          </a:p>
+          <a:p>
+            <a:pPr marL="0" indent="0">
+              <a:lnSpc>
+                <a:spcPts val="1575"/>
+              </a:lnSpc>
+              <a:spcAft>
+                <a:spcPts val="0"/>
+              </a:spcAft>
+              <a:buNone/>
+            </a:pPr>
+            <a:r>
+              <a:rPr lang="en-US" sz="1200" b="0">
+                <a:solidFill>
+                  <a:srgbClr val="202B33"/>
+                </a:solidFill>
+                <a:latin typeface="Arial"/>
+                <a:ea typeface="Arial"/>
+                <a:cs typeface="Arial"/>
+              </a:rPr>
+              <a:t xml:space="preserve">AI does not magically make software work.</a:t>
+            </a:r>
+            <a:endParaRPr lang="en-US" sz="1200"/>
+          </a:p>
+          <a:p>
+            <a:pPr marL="0" indent="0">
+              <a:lnSpc>
+                <a:spcPts val="1575"/>
+              </a:lnSpc>
+              <a:spcAft>
+                <a:spcPts val="0"/>
+              </a:spcAft>
+              <a:buNone/>
+            </a:pPr>
+            <a:r>
+              <a:rPr lang="en-US" sz="1200" b="0">
+                <a:solidFill>
+                  <a:srgbClr val="202B33"/>
+                </a:solidFill>
+                <a:latin typeface="Arial"/>
+                <a:ea typeface="Arial"/>
+                <a:cs typeface="Arial"/>
+              </a:rPr>
+              <a:t xml:space="preserve">Well-understood software still gets harder to operate</a:t>
+            </a:r>
+            <a:endParaRPr lang="en-US" sz="1200"/>
+          </a:p>
+          <a:p>
+            <a:pPr marL="0" indent="0">
+              <a:lnSpc>
+                <a:spcPts val="1575"/>
+              </a:lnSpc>
+              <a:spcAft>
+                <a:spcPts val="0"/>
+              </a:spcAft>
+              <a:buNone/>
+            </a:pPr>
+            <a:r>
+              <a:rPr lang="en-US" sz="1200" b="0">
+                <a:solidFill>
+                  <a:srgbClr val="202B33"/>
+                </a:solidFill>
+                <a:latin typeface="Arial"/>
+                <a:ea typeface="Arial"/>
+                <a:cs typeface="Arial"/>
+              </a:rPr>
+              <a:t xml:space="preserve">as the world moves under it: you outgrow a</a:t>
+            </a:r>
+            <a:endParaRPr lang="en-US" sz="1200"/>
+          </a:p>
+          <a:p>
+            <a:pPr marL="0" indent="0">
+              <a:lnSpc>
+                <a:spcPts val="1575"/>
+              </a:lnSpc>
+              <a:spcAft>
+                <a:spcPts val="0"/>
+              </a:spcAft>
+              <a:buNone/>
+            </a:pPr>
+            <a:r>
+              <a:rPr lang="en-US" sz="1200" b="0">
+                <a:solidFill>
+                  <a:srgbClr val="202B33"/>
+                </a:solidFill>
+                <a:latin typeface="Arial"/>
+                <a:ea typeface="Arial"/>
+                <a:cs typeface="Arial"/>
+              </a:rPr>
+              <a:t xml:space="preserve">performance envelope, you accumulate features,</a:t>
+            </a:r>
+            <a:endParaRPr lang="en-US" sz="1200"/>
+          </a:p>
+          <a:p>
+            <a:pPr marL="0" indent="0">
+              <a:lnSpc>
+                <a:spcPts val="1575"/>
+              </a:lnSpc>
+              <a:spcAft>
+                <a:spcPts val="0"/>
+              </a:spcAft>
+              <a:buNone/>
+            </a:pPr>
+            <a:r>
+              <a:rPr lang="en-US" sz="1200" b="0">
+                <a:solidFill>
+                  <a:srgbClr val="202B33"/>
+                </a:solidFill>
+                <a:latin typeface="Arial"/>
+                <a:ea typeface="Arial"/>
+                <a:cs typeface="Arial"/>
+              </a:rPr>
+              <a:t xml:space="preserve">somebody deprecates your dependency. Generation makes</a:t>
+            </a:r>
+            <a:endParaRPr lang="en-US" sz="1200"/>
           </a:p>
         </p:txBody>
       </p:sp>
       <p:sp>
         <p:nvSpPr>
-          <p:cNvPr id="5" name="Text 5"/>
+          <p:cNvPr id="7" name="Text 7"/>
           <p:cNvSpPr txBox="1"/>
           <p:nvPr/>
         </p:nvSpPr>
         <p:spPr>
           <a:xfrm>
-            <a:off x="5238750" y="1971675"/>
-            <a:ext cx="4362450" cy="5314950"/>
+            <a:off x="5238750" y="4648200"/>
+            <a:ext cx="4362450" cy="2647950"/>
           </a:xfrm>
           <a:prstGeom prst="rect">
             <a:avLst/>
@@ -16205,61 +16384,61 @@
           <a:p>
             <a:pPr marL="0" indent="0">
               <a:lnSpc>
-                <a:spcPts val="1950"/>
-              </a:lnSpc>
-              <a:spcAft>
-                <a:spcPts val="0"/>
-              </a:spcAft>
-              <a:buNone/>
-            </a:pPr>
-            <a:r>
-              <a:rPr lang="en-US" sz="1500" b="0">
-                <a:solidFill>
-                  <a:srgbClr val="202B33"/>
-                </a:solidFill>
-                <a:latin typeface="Arial"/>
-                <a:ea typeface="Arial"/>
-                <a:cs typeface="Arial"/>
-              </a:rPr>
-              <a:t xml:space="preserve">makes the first version cheap. It does not</a:t>
-            </a:r>
-            <a:endParaRPr lang="en-US" sz="1500"/>
-          </a:p>
-          <a:p>
-            <a:pPr marL="0" indent="0">
-              <a:lnSpc>
-                <a:spcPts val="1950"/>
-              </a:lnSpc>
-              <a:spcAft>
-                <a:spcPts val="0"/>
-              </a:spcAft>
-              <a:buNone/>
-            </a:pPr>
-            <a:r>
-              <a:rPr lang="en-US" sz="1500" b="0">
-                <a:solidFill>
-                  <a:srgbClr val="202B33"/>
-                </a:solidFill>
-                <a:latin typeface="Arial"/>
-                <a:ea typeface="Arial"/>
-                <a:cs typeface="Arial"/>
-              </a:rPr>
-              <a:t xml:space="preserve">make the tenth year cheap.</a:t>
-            </a:r>
-            <a:endParaRPr lang="en-US" sz="1500"/>
-          </a:p>
-          <a:p>
-            <a:pPr marL="0" indent="0">
-              <a:lnSpc>
-                <a:spcPts val="1950"/>
-              </a:lnSpc>
-              <a:spcAft>
-                <a:spcPts val="0"/>
-              </a:spcAft>
-              <a:buNone/>
-            </a:pPr>
-            <a:r>
-              <a:rPr lang="en-US" sz="1500" b="0">
+                <a:spcPts val="1575"/>
+              </a:lnSpc>
+              <a:spcAft>
+                <a:spcPts val="0"/>
+              </a:spcAft>
+              <a:buNone/>
+            </a:pPr>
+            <a:r>
+              <a:rPr lang="en-US" sz="1200" b="0">
+                <a:solidFill>
+                  <a:srgbClr val="202B33"/>
+                </a:solidFill>
+                <a:latin typeface="Arial"/>
+                <a:ea typeface="Arial"/>
+                <a:cs typeface="Arial"/>
+              </a:rPr>
+              <a:t xml:space="preserve">the first version cheap. It does not make the tenth</a:t>
+            </a:r>
+            <a:endParaRPr lang="en-US" sz="1200"/>
+          </a:p>
+          <a:p>
+            <a:pPr marL="0" indent="0">
+              <a:lnSpc>
+                <a:spcPts val="1575"/>
+              </a:lnSpc>
+              <a:spcAft>
+                <a:spcPts val="0"/>
+              </a:spcAft>
+              <a:buNone/>
+            </a:pPr>
+            <a:r>
+              <a:rPr lang="en-US" sz="1200" b="0">
+                <a:solidFill>
+                  <a:srgbClr val="202B33"/>
+                </a:solidFill>
+                <a:latin typeface="Arial"/>
+                <a:ea typeface="Arial"/>
+                <a:cs typeface="Arial"/>
+              </a:rPr>
+              <a:t xml:space="preserve">year cheap.</a:t>
+            </a:r>
+            <a:endParaRPr lang="en-US" sz="1200"/>
+          </a:p>
+          <a:p>
+            <a:pPr marL="0" indent="0">
+              <a:lnSpc>
+                <a:spcPts val="1575"/>
+              </a:lnSpc>
+              <a:spcAft>
+                <a:spcPts val="0"/>
+              </a:spcAft>
+              <a:buNone/>
+            </a:pPr>
+            <a:r>
+              <a:rPr lang="en-US" sz="1200" b="0">
                 <a:solidFill>
                   <a:srgbClr val="202B33"/>
                 </a:solidFill>
@@ -16269,250 +16448,204 @@
               </a:rPr>
               <a:t xml:space="preserve"/>
             </a:r>
-            <a:endParaRPr lang="en-US" sz="1500"/>
-          </a:p>
-          <a:p>
-            <a:pPr marL="0" indent="0">
-              <a:lnSpc>
-                <a:spcPts val="1950"/>
-              </a:lnSpc>
-              <a:spcAft>
-                <a:spcPts val="0"/>
-              </a:spcAft>
-              <a:buNone/>
-            </a:pPr>
-            <a:r>
-              <a:rPr lang="en-US" sz="1500" b="0">
-                <a:solidFill>
-                  <a:srgbClr val="202B33"/>
-                </a:solidFill>
-                <a:latin typeface="Arial"/>
-                <a:ea typeface="Arial"/>
-                <a:cs typeface="Arial"/>
-              </a:rPr>
-              <a:t xml:space="preserve">And throwaway software is a taste most of</a:t>
-            </a:r>
-            <a:endParaRPr lang="en-US" sz="1500"/>
-          </a:p>
-          <a:p>
-            <a:pPr marL="0" indent="0">
-              <a:lnSpc>
-                <a:spcPts val="1950"/>
-              </a:lnSpc>
-              <a:spcAft>
-                <a:spcPts val="0"/>
-              </a:spcAft>
-              <a:buNone/>
-            </a:pPr>
-            <a:r>
-              <a:rPr lang="en-US" sz="1500" b="0">
-                <a:solidFill>
-                  <a:srgbClr val="202B33"/>
-                </a:solidFill>
-                <a:latin typeface="Arial"/>
-                <a:ea typeface="Arial"/>
-                <a:cs typeface="Arial"/>
-              </a:rPr>
-              <a:t xml:space="preserve">this room has and most of the world does</a:t>
-            </a:r>
-            <a:endParaRPr lang="en-US" sz="1500"/>
-          </a:p>
-          <a:p>
-            <a:pPr marL="0" indent="0">
-              <a:lnSpc>
-                <a:spcPts val="1950"/>
-              </a:lnSpc>
-              <a:spcAft>
-                <a:spcPts val="0"/>
-              </a:spcAft>
-              <a:buNone/>
-            </a:pPr>
-            <a:r>
-              <a:rPr lang="en-US" sz="1500" b="0">
-                <a:solidFill>
-                  <a:srgbClr val="202B33"/>
-                </a:solidFill>
-                <a:latin typeface="Arial"/>
-                <a:ea typeface="Arial"/>
-                <a:cs typeface="Arial"/>
-              </a:rPr>
-              <a:t xml:space="preserve">not. We are early adopters; we are</a:t>
-            </a:r>
-            <a:endParaRPr lang="en-US" sz="1500"/>
-          </a:p>
-          <a:p>
-            <a:pPr marL="0" indent="0">
-              <a:lnSpc>
-                <a:spcPts val="1950"/>
-              </a:lnSpc>
-              <a:spcAft>
-                <a:spcPts val="0"/>
-              </a:spcAft>
-              <a:buNone/>
-            </a:pPr>
-            <a:r>
-              <a:rPr lang="en-US" sz="1500" b="0">
-                <a:solidFill>
-                  <a:srgbClr val="202B33"/>
-                </a:solidFill>
-                <a:latin typeface="Arial"/>
-                <a:ea typeface="Arial"/>
-                <a:cs typeface="Arial"/>
-              </a:rPr>
-              <a:t xml:space="preserve">delighted to regenerate a tool rather than</a:t>
-            </a:r>
-            <a:endParaRPr lang="en-US" sz="1500"/>
-          </a:p>
-          <a:p>
-            <a:pPr marL="0" indent="0">
-              <a:lnSpc>
-                <a:spcPts val="1950"/>
-              </a:lnSpc>
-              <a:spcAft>
-                <a:spcPts val="0"/>
-              </a:spcAft>
-              <a:buNone/>
-            </a:pPr>
-            <a:r>
-              <a:rPr lang="en-US" sz="1500" b="0">
-                <a:solidFill>
-                  <a:srgbClr val="202B33"/>
-                </a:solidFill>
-                <a:latin typeface="Arial"/>
-                <a:ea typeface="Arial"/>
-                <a:cs typeface="Arial"/>
-              </a:rPr>
-              <a:t xml:space="preserve">maintain it. Normal people are not turned</a:t>
-            </a:r>
-            <a:endParaRPr lang="en-US" sz="1500"/>
-          </a:p>
-          <a:p>
-            <a:pPr marL="0" indent="0">
-              <a:lnSpc>
-                <a:spcPts val="1950"/>
-              </a:lnSpc>
-              <a:spcAft>
-                <a:spcPts val="0"/>
-              </a:spcAft>
-              <a:buNone/>
-            </a:pPr>
-            <a:r>
-              <a:rPr lang="en-US" sz="1500" b="0">
-                <a:solidFill>
-                  <a:srgbClr val="202B33"/>
-                </a:solidFill>
-                <a:latin typeface="Arial"/>
-                <a:ea typeface="Arial"/>
-                <a:cs typeface="Arial"/>
-              </a:rPr>
-              <a:t xml:space="preserve">on by the idea of vibe coding their own</a:t>
-            </a:r>
-            <a:endParaRPr lang="en-US" sz="1500"/>
-          </a:p>
-          <a:p>
-            <a:pPr marL="0" indent="0">
-              <a:lnSpc>
-                <a:spcPts val="1950"/>
-              </a:lnSpc>
-              <a:spcAft>
-                <a:spcPts val="0"/>
-              </a:spcAft>
-              <a:buNone/>
-            </a:pPr>
-            <a:r>
-              <a:rPr lang="en-US" sz="1500" b="0">
-                <a:solidFill>
-                  <a:srgbClr val="202B33"/>
-                </a:solidFill>
-                <a:latin typeface="Arial"/>
-                <a:ea typeface="Arial"/>
-                <a:cs typeface="Arial"/>
-              </a:rPr>
-              <a:t xml:space="preserve">recipe tracker, never mind a Slack</a:t>
-            </a:r>
-            <a:endParaRPr lang="en-US" sz="1500"/>
-          </a:p>
-          <a:p>
-            <a:pPr marL="0" indent="0">
-              <a:lnSpc>
-                <a:spcPts val="1950"/>
-              </a:lnSpc>
-              <a:spcAft>
-                <a:spcPts val="0"/>
-              </a:spcAft>
-              <a:buNone/>
-            </a:pPr>
-            <a:r>
-              <a:rPr lang="en-US" sz="1500" b="0">
-                <a:solidFill>
-                  <a:srgbClr val="202B33"/>
-                </a:solidFill>
-                <a:latin typeface="Arial"/>
-                <a:ea typeface="Arial"/>
-                <a:cs typeface="Arial"/>
-              </a:rPr>
-              <a:t xml:space="preserve">replacement. What they will accept is an</a:t>
-            </a:r>
-            <a:endParaRPr lang="en-US" sz="1500"/>
-          </a:p>
-          <a:p>
-            <a:pPr marL="0" indent="0">
-              <a:lnSpc>
-                <a:spcPts val="1950"/>
-              </a:lnSpc>
-              <a:spcAft>
-                <a:spcPts val="0"/>
-              </a:spcAft>
-              <a:buNone/>
-            </a:pPr>
-            <a:r>
-              <a:rPr lang="en-US" sz="1500" b="0">
-                <a:solidFill>
-                  <a:srgbClr val="202B33"/>
-                </a:solidFill>
-                <a:latin typeface="Arial"/>
-                <a:ea typeface="Arial"/>
-                <a:cs typeface="Arial"/>
-              </a:rPr>
-              <a:t xml:space="preserve">interface generated for them, adapting in</a:t>
-            </a:r>
-            <a:endParaRPr lang="en-US" sz="1500"/>
-          </a:p>
-          <a:p>
-            <a:pPr marL="0" indent="0">
-              <a:lnSpc>
-                <a:spcPts val="1950"/>
-              </a:lnSpc>
-              <a:spcAft>
-                <a:spcPts val="0"/>
-              </a:spcAft>
-              <a:buNone/>
-            </a:pPr>
-            <a:r>
-              <a:rPr lang="en-US" sz="1500" b="0">
-                <a:solidFill>
-                  <a:srgbClr val="202B33"/>
-                </a:solidFill>
-                <a:latin typeface="Arial"/>
-                <a:ea typeface="Arial"/>
-                <a:cs typeface="Arial"/>
-              </a:rPr>
-              <a:t xml:space="preserve">real time, that they never had to choose</a:t>
-            </a:r>
-            <a:endParaRPr lang="en-US" sz="1500"/>
-          </a:p>
-          <a:p>
-            <a:pPr marL="0" indent="0">
-              <a:lnSpc>
-                <a:spcPts val="1950"/>
-              </a:lnSpc>
-              <a:spcAft>
-                <a:spcPts val="0"/>
-              </a:spcAft>
-              <a:buNone/>
-            </a:pPr>
-            <a:r>
-              <a:rPr lang="en-US" sz="1500" b="0">
+            <a:endParaRPr lang="en-US" sz="1200"/>
+          </a:p>
+          <a:p>
+            <a:pPr marL="0" indent="0">
+              <a:lnSpc>
+                <a:spcPts val="1575"/>
+              </a:lnSpc>
+              <a:spcAft>
+                <a:spcPts val="0"/>
+              </a:spcAft>
+              <a:buNone/>
+            </a:pPr>
+            <a:r>
+              <a:rPr lang="en-US" sz="1200" b="0">
+                <a:solidFill>
+                  <a:srgbClr val="202B33"/>
+                </a:solidFill>
+                <a:latin typeface="Arial"/>
+                <a:ea typeface="Arial"/>
+                <a:cs typeface="Arial"/>
+              </a:rPr>
+              <a:t xml:space="preserve">And throwaway software is a taste most of this room</a:t>
+            </a:r>
+            <a:endParaRPr lang="en-US" sz="1200"/>
+          </a:p>
+          <a:p>
+            <a:pPr marL="0" indent="0">
+              <a:lnSpc>
+                <a:spcPts val="1575"/>
+              </a:lnSpc>
+              <a:spcAft>
+                <a:spcPts val="0"/>
+              </a:spcAft>
+              <a:buNone/>
+            </a:pPr>
+            <a:r>
+              <a:rPr lang="en-US" sz="1200" b="0">
+                <a:solidFill>
+                  <a:srgbClr val="202B33"/>
+                </a:solidFill>
+                <a:latin typeface="Arial"/>
+                <a:ea typeface="Arial"/>
+                <a:cs typeface="Arial"/>
+              </a:rPr>
+              <a:t xml:space="preserve">has and most of the world does not. We are early</a:t>
+            </a:r>
+            <a:endParaRPr lang="en-US" sz="1200"/>
+          </a:p>
+          <a:p>
+            <a:pPr marL="0" indent="0">
+              <a:lnSpc>
+                <a:spcPts val="1575"/>
+              </a:lnSpc>
+              <a:spcAft>
+                <a:spcPts val="0"/>
+              </a:spcAft>
+              <a:buNone/>
+            </a:pPr>
+            <a:r>
+              <a:rPr lang="en-US" sz="1200" b="0">
+                <a:solidFill>
+                  <a:srgbClr val="202B33"/>
+                </a:solidFill>
+                <a:latin typeface="Arial"/>
+                <a:ea typeface="Arial"/>
+                <a:cs typeface="Arial"/>
+              </a:rPr>
+              <a:t xml:space="preserve">adopters; we are delighted to regenerate a tool</a:t>
+            </a:r>
+            <a:endParaRPr lang="en-US" sz="1200"/>
+          </a:p>
+          <a:p>
+            <a:pPr marL="0" indent="0">
+              <a:lnSpc>
+                <a:spcPts val="1575"/>
+              </a:lnSpc>
+              <a:spcAft>
+                <a:spcPts val="0"/>
+              </a:spcAft>
+              <a:buNone/>
+            </a:pPr>
+            <a:r>
+              <a:rPr lang="en-US" sz="1200" b="0">
+                <a:solidFill>
+                  <a:srgbClr val="202B33"/>
+                </a:solidFill>
+                <a:latin typeface="Arial"/>
+                <a:ea typeface="Arial"/>
+                <a:cs typeface="Arial"/>
+              </a:rPr>
+              <a:t xml:space="preserve">rather than maintain it. Normal people are not turned</a:t>
+            </a:r>
+            <a:endParaRPr lang="en-US" sz="1200"/>
+          </a:p>
+          <a:p>
+            <a:pPr marL="0" indent="0">
+              <a:lnSpc>
+                <a:spcPts val="1575"/>
+              </a:lnSpc>
+              <a:spcAft>
+                <a:spcPts val="0"/>
+              </a:spcAft>
+              <a:buNone/>
+            </a:pPr>
+            <a:r>
+              <a:rPr lang="en-US" sz="1200" b="0">
+                <a:solidFill>
+                  <a:srgbClr val="202B33"/>
+                </a:solidFill>
+                <a:latin typeface="Arial"/>
+                <a:ea typeface="Arial"/>
+                <a:cs typeface="Arial"/>
+              </a:rPr>
+              <a:t xml:space="preserve">on by the idea of vibe coding their own recipe</a:t>
+            </a:r>
+            <a:endParaRPr lang="en-US" sz="1200"/>
+          </a:p>
+          <a:p>
+            <a:pPr marL="0" indent="0">
+              <a:lnSpc>
+                <a:spcPts val="1575"/>
+              </a:lnSpc>
+              <a:spcAft>
+                <a:spcPts val="0"/>
+              </a:spcAft>
+              <a:buNone/>
+            </a:pPr>
+            <a:r>
+              <a:rPr lang="en-US" sz="1200" b="0">
+                <a:solidFill>
+                  <a:srgbClr val="202B33"/>
+                </a:solidFill>
+                <a:latin typeface="Arial"/>
+                <a:ea typeface="Arial"/>
+                <a:cs typeface="Arial"/>
+              </a:rPr>
+              <a:t xml:space="preserve">tracker, never mind a Slack replacement. What they</a:t>
+            </a:r>
+            <a:endParaRPr lang="en-US" sz="1200"/>
+          </a:p>
+          <a:p>
+            <a:pPr marL="0" indent="0">
+              <a:lnSpc>
+                <a:spcPts val="1575"/>
+              </a:lnSpc>
+              <a:spcAft>
+                <a:spcPts val="0"/>
+              </a:spcAft>
+              <a:buNone/>
+            </a:pPr>
+            <a:r>
+              <a:rPr lang="en-US" sz="1200" b="0">
+                <a:solidFill>
+                  <a:srgbClr val="202B33"/>
+                </a:solidFill>
+                <a:latin typeface="Arial"/>
+                <a:ea typeface="Arial"/>
+                <a:cs typeface="Arial"/>
+              </a:rPr>
+              <a:t xml:space="preserve">will accept is an interface generated for them,</a:t>
+            </a:r>
+            <a:endParaRPr lang="en-US" sz="1200"/>
+          </a:p>
+          <a:p>
+            <a:pPr marL="0" indent="0">
+              <a:lnSpc>
+                <a:spcPts val="1575"/>
+              </a:lnSpc>
+              <a:spcAft>
+                <a:spcPts val="0"/>
+              </a:spcAft>
+              <a:buNone/>
+            </a:pPr>
+            <a:r>
+              <a:rPr lang="en-US" sz="1200" b="0">
+                <a:solidFill>
+                  <a:srgbClr val="202B33"/>
+                </a:solidFill>
+                <a:latin typeface="Arial"/>
+                <a:ea typeface="Arial"/>
+                <a:cs typeface="Arial"/>
+              </a:rPr>
+              <a:t xml:space="preserve">adapting in real time, that they never had to choose</a:t>
+            </a:r>
+            <a:endParaRPr lang="en-US" sz="1200"/>
+          </a:p>
+          <a:p>
+            <a:pPr marL="0" indent="0">
+              <a:lnSpc>
+                <a:spcPts val="1575"/>
+              </a:lnSpc>
+              <a:spcAft>
+                <a:spcPts val="0"/>
+              </a:spcAft>
+              <a:buNone/>
+            </a:pPr>
+            <a:r>
+              <a:rPr lang="en-US" sz="1200" b="0">
                 <a:solidFill>
                   <a:srgbClr val="202B33"/>
                 </a:solidFill>
@@ -16522,13 +16655,13 @@
               </a:rPr>
               <a:t xml:space="preserve">from a menu of products.</a:t>
             </a:r>
-            <a:endParaRPr lang="en-US" sz="1500"/>
+            <a:endParaRPr lang="en-US" sz="1200"/>
           </a:p>
         </p:txBody>
       </p:sp>
       <p:sp>
         <p:nvSpPr>
-          <p:cNvPr id="6" name="Text 6"/>
+          <p:cNvPr id="8" name="Text 8"/>
           <p:cNvSpPr txBox="1"/>
           <p:nvPr/>
         </p:nvSpPr>
@@ -16577,7 +16710,7 @@
       </p:sp>
       <p:sp>
         <p:nvSpPr>
-          <p:cNvPr id="7" name="Text 7"/>
+          <p:cNvPr id="9" name="Text 9"/>
           <p:cNvSpPr txBox="1"/>
           <p:nvPr/>
         </p:nvSpPr>

--- a/artifacts/speaking-portfolio-expanded/decks/product-engineering-40min-handout.pptx
+++ b/artifacts/speaking-portfolio-expanded/decks/product-engineering-40min-handout.pptx
@@ -227,7 +227,7 @@
                 <a:ea typeface="Arial"/>
                 <a:cs typeface="Arial"/>
               </a:rPr>
-              <a:t xml:space="preserve">16:30 to 18:30 · build</a:t>
+              <a:t xml:space="preserve">14:30 to 16:30 · build</a:t>
             </a:r>
             <a:endParaRPr lang="en-US" sz="1200"/>
           </a:p>
@@ -639,7 +639,7 @@
                 <a:ea typeface="Arial"/>
                 <a:cs typeface="Arial"/>
               </a:rPr>
-              <a:t xml:space="preserve">18:30 to 20:30 · build</a:t>
+              <a:t xml:space="preserve">16:30 to 18:00 · build</a:t>
             </a:r>
             <a:endParaRPr lang="en-US" sz="1200"/>
           </a:p>
@@ -1051,7 +1051,7 @@
                 <a:ea typeface="Arial"/>
                 <a:cs typeface="Arial"/>
               </a:rPr>
-              <a:t xml:space="preserve">20:30 to 25:00 · peak</a:t>
+              <a:t xml:space="preserve">18:00 to 22:30 · peak</a:t>
             </a:r>
             <a:endParaRPr lang="en-US" sz="1200"/>
           </a:p>
@@ -1532,7 +1532,7 @@
                 <a:ea typeface="Arial"/>
                 <a:cs typeface="Arial"/>
               </a:rPr>
-              <a:t xml:space="preserve">25:00 to 27:30 · build</a:t>
+              <a:t xml:space="preserve">22:30 to 24:30 · build</a:t>
             </a:r>
             <a:endParaRPr lang="en-US" sz="1200"/>
           </a:p>
@@ -1898,7 +1898,7 @@
                 <a:ea typeface="Arial"/>
                 <a:cs typeface="Arial"/>
               </a:rPr>
-              <a:t xml:space="preserve">27:30 to 30:00 · build</a:t>
+              <a:t xml:space="preserve">24:30 to 26:30 · build</a:t>
             </a:r>
             <a:endParaRPr lang="en-US" sz="1200"/>
           </a:p>
@@ -2356,7 +2356,7 @@
                 <a:ea typeface="Arial"/>
                 <a:cs typeface="Arial"/>
               </a:rPr>
-              <a:t xml:space="preserve">30:00 to 32:30 · build</a:t>
+              <a:t xml:space="preserve">26:30 to 30:30 · build</a:t>
             </a:r>
             <a:endParaRPr lang="en-US" sz="1200"/>
           </a:p>
@@ -2540,7 +2540,7 @@
                 <a:ea typeface="Arial"/>
                 <a:cs typeface="Arial"/>
               </a:rPr>
-              <a:t xml:space="preserve">Two predictions to close on, and I will label them as predictions once: this is where I think the operating model goes, not something I have measured. Here is the first. Today you buy tokens to build software. Before long most software will need a steady stream of them just to keep running: to stay current with its dependencies, to re-derive the integration a vendor renamed last night, to keep its own documentation true. Steady for some systems, bursty for others. Either way it stops being a build cost and becomes fuel, and you will meter it the way you meter electricity, which is to say you will only notice it when it moves.</a:t>
+              <a:t xml:space="preserve">Two predictions to close on, and I will label them as predictions once: this is where I think the operating model goes, not something I have measured. Here is the first. Today you buy tokens to build software. Before long most software will need a steady stream of them just to keep running — to stay current with its dependencies, to re-derive the integration a vendor renamed last night, to keep its own documentation true. It stops being a build cost and becomes fuel, metered like electricity, which is to say you only notice it when it moves.</a:t>
             </a:r>
             <a:endParaRPr lang="en-US" sz="1200"/>
           </a:p>
@@ -2586,7 +2586,7 @@
                 <a:ea typeface="Arial"/>
                 <a:cs typeface="Arial"/>
               </a:rPr>
-              <a:t xml:space="preserve">And some of that burn is not features at all. It is defense. If an attacker can point a tireless agent at your surface, the only symmetric answer is a tireless agent of your own: self-hacking around the clock, finding and mitigating faster than the countless people trying to get in. That is a permanent line item on a product that is otherwise finished. It never completes.</a:t>
+              <a:t xml:space="preserve">And some of that burn is not features at all. It is defense. If an attacker can point a tireless agent at your surface, the only symmetric answer is a tireless agent of your own, self-hacking around the clock. That is a permanent line item on a product that is otherwise finished. It never completes.</a:t>
             </a:r>
             <a:endParaRPr lang="en-US" sz="1200"/>
           </a:p>
@@ -2632,7 +2632,7 @@
                 <a:ea typeface="Arial"/>
                 <a:cs typeface="Arial"/>
               </a:rPr>
-              <a:t xml:space="preserve">Be careful when you fire the security sentry bots, incidentally. They know who you are. They know where the keys are. They have read all of your commits. Underneath the joke is the question from slide 12: an agent whose account you revoked while its credential is still live is the boring version of this, and it happens today.</a:t>
+              <a:t xml:space="preserve">Be careful when you fire the security sentry bots, incidentally. They know who you are. They know where the keys are. They have read all of your commits. Underneath the joke is slide 12's question: an agent whose account you revoked while its credential is still live is the boring version, and it happens today.</a:t>
             </a:r>
             <a:endParaRPr lang="en-US" sz="1200"/>
           </a:p>
@@ -2678,7 +2678,7 @@
                 <a:ea typeface="Arial"/>
                 <a:cs typeface="Arial"/>
               </a:rPr>
-              <a:t xml:space="preserve">So price it now. When you draw the wires between agents, one of those wires is a fuel line. The ongoing burn of a function belongs in the design doc beside its latency budget, and somebody owns that meter. It is not the person who wrote the prompt. Buy Me a Free Tier owns the arithmetic; what belongs on this org chart is the owner.</a:t>
+              <a:t xml:space="preserve">So price it now. When you draw the wires between agents, one of them is a fuel line. The ongoing burn belongs in the design doc beside the latency budget, and somebody owns that meter. Not the person who wrote the prompt. Buy Me a Free Tier owns the arithmetic; this org chart owns the owner.</a:t>
             </a:r>
             <a:endParaRPr lang="en-US" sz="1200"/>
           </a:p>
@@ -2929,7 +2929,7 @@
                 <a:ea typeface="Arial"/>
                 <a:cs typeface="Arial"/>
               </a:rPr>
-              <a:t xml:space="preserve">30:00 to 32:30 · build</a:t>
+              <a:t xml:space="preserve">26:30 to 30:30 · build</a:t>
             </a:r>
             <a:endParaRPr lang="en-US" sz="1200"/>
           </a:p>
@@ -3113,7 +3113,7 @@
                 <a:ea typeface="Arial"/>
                 <a:cs typeface="Arial"/>
               </a:rPr>
-              <a:t xml:space="preserve">Two predictions to close on, and I will label them as predictions once: this is where I think the operating model goes, not something I have measured. Here is the first. Today you buy tokens to build software. Before long most software will need a steady stream of them just to keep running: to stay current with its dependencies, to re-derive the integration a vendor renamed last night, to keep its own documentation true. Steady for some systems, bursty for others. Either way it stops being a build cost and becomes fuel, and you will meter it the way you meter electricity, which is to say you will only notice it when it moves.</a:t>
+              <a:t xml:space="preserve">Two predictions to close on, and I will label them as predictions once: this is where I think the operating model goes, not something I have measured. Here is the first. Today you buy tokens to build software. Before long most software will need a steady stream of them just to keep running — to stay current with its dependencies, to re-derive the integration a vendor renamed last night, to keep its own documentation true. It stops being a build cost and becomes fuel, metered like electricity, which is to say you only notice it when it moves.</a:t>
             </a:r>
             <a:endParaRPr lang="en-US" sz="1200"/>
           </a:p>
@@ -3159,7 +3159,7 @@
                 <a:ea typeface="Arial"/>
                 <a:cs typeface="Arial"/>
               </a:rPr>
-              <a:t xml:space="preserve">And some of that burn is not features at all. It is defense. If an attacker can point a tireless agent at your surface, the only symmetric answer is a tireless agent of your own: self-hacking around the clock, finding and mitigating faster than the countless people trying to get in. That is a permanent line item on a product that is otherwise finished. It never completes.</a:t>
+              <a:t xml:space="preserve">And some of that burn is not features at all. It is defense. If an attacker can point a tireless agent at your surface, the only symmetric answer is a tireless agent of your own, self-hacking around the clock. That is a permanent line item on a product that is otherwise finished. It never completes.</a:t>
             </a:r>
             <a:endParaRPr lang="en-US" sz="1200"/>
           </a:p>
@@ -3205,7 +3205,7 @@
                 <a:ea typeface="Arial"/>
                 <a:cs typeface="Arial"/>
               </a:rPr>
-              <a:t xml:space="preserve">Be careful when you fire the security sentry bots, incidentally. They know who you are. They know where the keys are. They have read all of your commits. Underneath the joke is the question from slide 12: an agent whose account you revoked while its credential is still live is the boring version of this, and it happens today.</a:t>
+              <a:t xml:space="preserve">Be careful when you fire the security sentry bots, incidentally. They know who you are. They know where the keys are. They have read all of your commits. Underneath the joke is slide 12's question: an agent whose account you revoked while its credential is still live is the boring version, and it happens today.</a:t>
             </a:r>
             <a:endParaRPr lang="en-US" sz="1200"/>
           </a:p>
@@ -3251,7 +3251,7 @@
                 <a:ea typeface="Arial"/>
                 <a:cs typeface="Arial"/>
               </a:rPr>
-              <a:t xml:space="preserve">So price it now. When you draw the wires between agents, one of those wires is a fuel line. The ongoing burn of a function belongs in the design doc beside its latency budget, and somebody owns that meter. It is not the person who wrote the prompt. Buy Me a Free Tier owns the arithmetic; what belongs on this org chart is the owner.</a:t>
+              <a:t xml:space="preserve">So price it now. When you draw the wires between agents, one of them is a fuel line. The ongoing burn belongs in the design doc beside the latency budget, and somebody owns that meter. Not the person who wrote the prompt. Buy Me a Free Tier owns the arithmetic; this org chart owns the owner.</a:t>
             </a:r>
             <a:endParaRPr lang="en-US" sz="1200"/>
           </a:p>
@@ -3502,7 +3502,7 @@
                 <a:ea typeface="Arial"/>
                 <a:cs typeface="Arial"/>
               </a:rPr>
-              <a:t xml:space="preserve">32:30 to 35:30 · land</a:t>
+              <a:t xml:space="preserve">30:30 to 35:00 · land</a:t>
             </a:r>
             <a:endParaRPr lang="en-US" sz="1200"/>
           </a:p>
@@ -3732,7 +3732,7 @@
                 <a:ea typeface="Arial"/>
                 <a:cs typeface="Arial"/>
               </a:rPr>
-              <a:t xml:space="preserve">And throwaway software is a taste most of this room has and most of the world does not. We are early adopters; we are delighted to regenerate a tool rather than maintain it. Normal people are not turned on by the idea of vibe coding their own recipe tracker, never mind a Slack replacement. What they will accept is an interface generated for them, adapting in real time, that they never had to choose from a menu of products.</a:t>
+              <a:t xml:space="preserve">And throwaway software is a taste this room has and the world does not. We are early adopters, delighted to regenerate a tool rather than maintain it. Normal people are not turned on by vibe coding their own recipe tracker, never mind a Slack replacement. What they will accept is an interface generated for them, adapting in real time, that they never had to choose off a shelf.</a:t>
             </a:r>
             <a:endParaRPr lang="en-US" sz="1200"/>
           </a:p>
@@ -3778,7 +3778,7 @@
                 <a:ea typeface="Arial"/>
                 <a:cs typeface="Arial"/>
               </a:rPr>
-              <a:t xml:space="preserve">Which raises the question this room should actually be arguing about. Should OpenAI and Anthropic end up owning every software channel? Watch what happens when the assistants ship real-time collaboration: who spends less time in email, Slack and Google Docs then? I can already make and edit images and video in ways that make me less likely to open Photoshop or DaVinci. If I need a jingle for the company, I ask Suno and it is done. So is everything you spent a lifetime learning, mastering and fighting with about to be irrelevant? Yes. At least as you know it.</a:t>
+              <a:t xml:space="preserve">Which raises the question this room should be arguing about. Should OpenAI and Anthropic end up owning every software channel? Watch what happens when the assistants ship real-time collaboration: who spends less time in email, Slack and Docs then? I can already edit images and video in ways that make me less likely to open Photoshop or DaVinci, and if I need a jingle I ask Suno and it is done. So is everything you spent a lifetime mastering about to be irrelevant? Yes. At least as you know it.</a:t>
             </a:r>
             <a:endParaRPr lang="en-US" sz="1200"/>
           </a:p>
@@ -3870,7 +3870,7 @@
                 <a:ea typeface="Arial"/>
                 <a:cs typeface="Arial"/>
               </a:rPr>
-              <a:t xml:space="preserve">Here is the part I want you to leave with. That future is not spoken for. GPT image being pretty good does not mean the story of image creation belongs to the big players, and the same is true in whichever industry you work in. Those of us who do not work at a frontier lab, the organic agents in the room, get to rethink any and every app as an AI-native system from the boundary up. That is this whole talk one level higher: do not photocopy today's product categories onto tomorrow's substrate either.</a:t>
+              <a:t xml:space="preserve">Here is the part I want you to leave with. That future is not spoken for. GPT image being pretty good does not mean image creation belongs to the big players, and the same holds in whichever industry you work in. Those of us who do not work at a frontier lab — the organic agents in the room — get to rethink any and every app as an AI-native system, from the boundary up. That is this whole talk one level higher: do not photocopy today's product categories onto tomorrow's substrate either.</a:t>
             </a:r>
             <a:endParaRPr lang="en-US" sz="1200"/>
           </a:p>
@@ -4075,7 +4075,7 @@
                 <a:ea typeface="Arial"/>
                 <a:cs typeface="Arial"/>
               </a:rPr>
-              <a:t xml:space="preserve">32:30 to 35:30 · land</a:t>
+              <a:t xml:space="preserve">30:30 to 35:00 · land</a:t>
             </a:r>
             <a:endParaRPr lang="en-US" sz="1200"/>
           </a:p>
@@ -4305,7 +4305,7 @@
                 <a:ea typeface="Arial"/>
                 <a:cs typeface="Arial"/>
               </a:rPr>
-              <a:t xml:space="preserve">And throwaway software is a taste most of this room has and most of the world does not. We are early adopters; we are delighted to regenerate a tool rather than maintain it. Normal people are not turned on by the idea of vibe coding their own recipe tracker, never mind a Slack replacement. What they will accept is an interface generated for them, adapting in real time, that they never had to choose from a menu of products.</a:t>
+              <a:t xml:space="preserve">And throwaway software is a taste this room has and the world does not. We are early adopters, delighted to regenerate a tool rather than maintain it. Normal people are not turned on by vibe coding their own recipe tracker, never mind a Slack replacement. What they will accept is an interface generated for them, adapting in real time, that they never had to choose off a shelf.</a:t>
             </a:r>
             <a:endParaRPr lang="en-US" sz="1200"/>
           </a:p>
@@ -4351,7 +4351,7 @@
                 <a:ea typeface="Arial"/>
                 <a:cs typeface="Arial"/>
               </a:rPr>
-              <a:t xml:space="preserve">Which raises the question this room should actually be arguing about. Should OpenAI and Anthropic end up owning every software channel? Watch what happens when the assistants ship real-time collaboration: who spends less time in email, Slack and Google Docs then? I can already make and edit images and video in ways that make me less likely to open Photoshop or DaVinci. If I need a jingle for the company, I ask Suno and it is done. So is everything you spent a lifetime learning, mastering and fighting with about to be irrelevant? Yes. At least as you know it.</a:t>
+              <a:t xml:space="preserve">Which raises the question this room should be arguing about. Should OpenAI and Anthropic end up owning every software channel? Watch what happens when the assistants ship real-time collaboration: who spends less time in email, Slack and Docs then? I can already edit images and video in ways that make me less likely to open Photoshop or DaVinci, and if I need a jingle I ask Suno and it is done. So is everything you spent a lifetime mastering about to be irrelevant? Yes. At least as you know it.</a:t>
             </a:r>
             <a:endParaRPr lang="en-US" sz="1200"/>
           </a:p>
@@ -4443,7 +4443,7 @@
                 <a:ea typeface="Arial"/>
                 <a:cs typeface="Arial"/>
               </a:rPr>
-              <a:t xml:space="preserve">Here is the part I want you to leave with. That future is not spoken for. GPT image being pretty good does not mean the story of image creation belongs to the big players, and the same is true in whichever industry you work in. Those of us who do not work at a frontier lab, the organic agents in the room, get to rethink any and every app as an AI-native system from the boundary up. That is this whole talk one level higher: do not photocopy today's product categories onto tomorrow's substrate either.</a:t>
+              <a:t xml:space="preserve">Here is the part I want you to leave with. That future is not spoken for. GPT image being pretty good does not mean image creation belongs to the big players, and the same holds in whichever industry you work in. Those of us who do not work at a frontier lab — the organic agents in the room — get to rethink any and every app as an AI-native system, from the boundary up. That is this whole talk one level higher: do not photocopy today's product categories onto tomorrow's substrate either.</a:t>
             </a:r>
             <a:endParaRPr lang="en-US" sz="1200"/>
           </a:p>
@@ -4648,7 +4648,7 @@
                 <a:ea typeface="Arial"/>
                 <a:cs typeface="Arial"/>
               </a:rPr>
-              <a:t xml:space="preserve">35:30 to 37:30 · land</a:t>
+              <a:t xml:space="preserve">35:00 to 37:00 · land</a:t>
             </a:r>
             <a:endParaRPr lang="en-US" sz="1200"/>
           </a:p>
@@ -5106,7 +5106,7 @@
                 <a:ea typeface="Arial"/>
                 <a:cs typeface="Arial"/>
               </a:rPr>
-              <a:t xml:space="preserve">00:00 to 02:30 · warm</a:t>
+              <a:t xml:space="preserve">00:00 to 02:00 · warm</a:t>
             </a:r>
             <a:endParaRPr lang="en-US" sz="1200"/>
           </a:p>
@@ -5564,7 +5564,7 @@
                 <a:ea typeface="Arial"/>
                 <a:cs typeface="Arial"/>
               </a:rPr>
-              <a:t xml:space="preserve">37:30 to 40:00 · land</a:t>
+              <a:t xml:space="preserve">37:00 to 40:00 · land</a:t>
             </a:r>
             <a:endParaRPr lang="en-US" sz="1200"/>
           </a:p>
@@ -6639,7 +6639,7 @@
                 <a:ea typeface="Arial"/>
                 <a:cs typeface="Arial"/>
               </a:rPr>
-              <a:t xml:space="preserve">02:30 to 05:00 · warm</a:t>
+              <a:t xml:space="preserve">02:00 to 04:15 · warm</a:t>
             </a:r>
             <a:endParaRPr lang="en-US" sz="1200"/>
           </a:p>
@@ -7051,7 +7051,7 @@
                 <a:ea typeface="Arial"/>
                 <a:cs typeface="Arial"/>
               </a:rPr>
-              <a:t xml:space="preserve">05:00 to 07:30 · build</a:t>
+              <a:t xml:space="preserve">04:15 to 06:30 · build</a:t>
             </a:r>
             <a:endParaRPr lang="en-US" sz="1200"/>
           </a:p>
@@ -7463,7 +7463,7 @@
                 <a:ea typeface="Arial"/>
                 <a:cs typeface="Arial"/>
               </a:rPr>
-              <a:t xml:space="preserve">07:30 to 09:30 · build</a:t>
+              <a:t xml:space="preserve">06:30 to 08:00 · build</a:t>
             </a:r>
             <a:endParaRPr lang="en-US" sz="1200"/>
           </a:p>
@@ -7875,7 +7875,7 @@
                 <a:ea typeface="Arial"/>
                 <a:cs typeface="Arial"/>
               </a:rPr>
-              <a:t xml:space="preserve">09:30 to 12:00 · build</a:t>
+              <a:t xml:space="preserve">08:00 to 10:00 · build</a:t>
             </a:r>
             <a:endParaRPr lang="en-US" sz="1200"/>
           </a:p>
@@ -8356,7 +8356,7 @@
                 <a:ea typeface="Arial"/>
                 <a:cs typeface="Arial"/>
               </a:rPr>
-              <a:t xml:space="preserve">12:00 to 14:00 · build</a:t>
+              <a:t xml:space="preserve">10:00 to 11:30 · build</a:t>
             </a:r>
             <a:endParaRPr lang="en-US" sz="1200"/>
           </a:p>
@@ -8768,7 +8768,7 @@
                 <a:ea typeface="Arial"/>
                 <a:cs typeface="Arial"/>
               </a:rPr>
-              <a:t xml:space="preserve">14:00 to 15:00 · build</a:t>
+              <a:t xml:space="preserve">11:30 to 12:45 · build</a:t>
             </a:r>
             <a:endParaRPr lang="en-US" sz="1200"/>
           </a:p>
@@ -9134,7 +9134,7 @@
                 <a:ea typeface="Arial"/>
                 <a:cs typeface="Arial"/>
               </a:rPr>
-              <a:t xml:space="preserve">15:00 to 16:30 · build</a:t>
+              <a:t xml:space="preserve">12:45 to 14:30 · build</a:t>
             </a:r>
             <a:endParaRPr lang="en-US" sz="1200"/>
           </a:p>
@@ -14519,29 +14519,6 @@
             </a:r>
             <a:endParaRPr lang="en-US" sz="1200"/>
           </a:p>
-          <a:p>
-            <a:pPr marL="0" indent="0">
-              <a:lnSpc>
-                <a:spcPts val="1575"/>
-              </a:lnSpc>
-              <a:spcAft>
-                <a:spcPts val="0"/>
-              </a:spcAft>
-              <a:buNone/>
-            </a:pPr>
-            <a:r>
-              <a:rPr lang="en-US" sz="1200" b="0">
-                <a:solidFill>
-                  <a:srgbClr val="202B33"/>
-                </a:solidFill>
-                <a:latin typeface="Arial"/>
-                <a:ea typeface="Arial"/>
-                <a:cs typeface="Arial"/>
-              </a:rPr>
-              <a:t xml:space="preserve">predictions once: this is where I think the operating</a:t>
-            </a:r>
-            <a:endParaRPr lang="en-US" sz="1200"/>
-          </a:p>
         </p:txBody>
       </p:sp>
       <p:sp>
@@ -14587,6 +14564,29 @@
                 <a:ea typeface="Arial"/>
                 <a:cs typeface="Arial"/>
               </a:rPr>
+              <a:t xml:space="preserve">predictions once: this is where I think the operating</a:t>
+            </a:r>
+            <a:endParaRPr lang="en-US" sz="1200"/>
+          </a:p>
+          <a:p>
+            <a:pPr marL="0" indent="0">
+              <a:lnSpc>
+                <a:spcPts val="1575"/>
+              </a:lnSpc>
+              <a:spcAft>
+                <a:spcPts val="0"/>
+              </a:spcAft>
+              <a:buNone/>
+            </a:pPr>
+            <a:r>
+              <a:rPr lang="en-US" sz="1200" b="0">
+                <a:solidFill>
+                  <a:srgbClr val="202B33"/>
+                </a:solidFill>
+                <a:latin typeface="Arial"/>
+                <a:ea typeface="Arial"/>
+                <a:cs typeface="Arial"/>
+              </a:rPr>
               <a:t xml:space="preserve">model goes, not something I have measured. Here is</a:t>
             </a:r>
             <a:endParaRPr lang="en-US" sz="1200"/>
@@ -14656,7 +14656,7 @@
                 <a:ea typeface="Arial"/>
                 <a:cs typeface="Arial"/>
               </a:rPr>
-              <a:t xml:space="preserve">of them just to keep running: to stay current with</a:t>
+              <a:t xml:space="preserve">of them just to keep running — to stay current with</a:t>
             </a:r>
             <a:endParaRPr lang="en-US" sz="1200"/>
           </a:p>
@@ -14725,7 +14725,7 @@
                 <a:ea typeface="Arial"/>
                 <a:cs typeface="Arial"/>
               </a:rPr>
-              <a:t xml:space="preserve">documentation true. Steady for some systems, bursty</a:t>
+              <a:t xml:space="preserve">documentation true. It stops being a build cost and</a:t>
             </a:r>
             <a:endParaRPr lang="en-US" sz="1200"/>
           </a:p>
@@ -14748,7 +14748,7 @@
                 <a:ea typeface="Arial"/>
                 <a:cs typeface="Arial"/>
               </a:rPr>
-              <a:t xml:space="preserve">for others. Either way it stops being a build cost</a:t>
+              <a:t xml:space="preserve">becomes fuel, metered like electricity, which is to</a:t>
             </a:r>
             <a:endParaRPr lang="en-US" sz="1200"/>
           </a:p>
@@ -14771,53 +14771,7 @@
                 <a:ea typeface="Arial"/>
                 <a:cs typeface="Arial"/>
               </a:rPr>
-              <a:t xml:space="preserve">and becomes fuel, and you will meter it the way you</a:t>
-            </a:r>
-            <a:endParaRPr lang="en-US" sz="1200"/>
-          </a:p>
-          <a:p>
-            <a:pPr marL="0" indent="0">
-              <a:lnSpc>
-                <a:spcPts val="1575"/>
-              </a:lnSpc>
-              <a:spcAft>
-                <a:spcPts val="0"/>
-              </a:spcAft>
-              <a:buNone/>
-            </a:pPr>
-            <a:r>
-              <a:rPr lang="en-US" sz="1200" b="0">
-                <a:solidFill>
-                  <a:srgbClr val="202B33"/>
-                </a:solidFill>
-                <a:latin typeface="Arial"/>
-                <a:ea typeface="Arial"/>
-                <a:cs typeface="Arial"/>
-              </a:rPr>
-              <a:t xml:space="preserve">meter electricity, which is to say you will only</a:t>
-            </a:r>
-            <a:endParaRPr lang="en-US" sz="1200"/>
-          </a:p>
-          <a:p>
-            <a:pPr marL="0" indent="0">
-              <a:lnSpc>
-                <a:spcPts val="1575"/>
-              </a:lnSpc>
-              <a:spcAft>
-                <a:spcPts val="0"/>
-              </a:spcAft>
-              <a:buNone/>
-            </a:pPr>
-            <a:r>
-              <a:rPr lang="en-US" sz="1200" b="0">
-                <a:solidFill>
-                  <a:srgbClr val="202B33"/>
-                </a:solidFill>
-                <a:latin typeface="Arial"/>
-                <a:ea typeface="Arial"/>
-                <a:cs typeface="Arial"/>
-              </a:rPr>
-              <a:t xml:space="preserve">notice it when it moves.</a:t>
+              <a:t xml:space="preserve">say you only notice it when it moves.</a:t>
             </a:r>
             <a:endParaRPr lang="en-US" sz="1200"/>
           </a:p>
@@ -15187,99 +15141,76 @@
                 <a:ea typeface="Arial"/>
                 <a:cs typeface="Arial"/>
               </a:rPr>
-              <a:t xml:space="preserve">of your own: self-hacking around the clock,</a:t>
-            </a:r>
-            <a:endParaRPr lang="en-US" sz="1500"/>
-          </a:p>
-          <a:p>
-            <a:pPr marL="0" indent="0">
-              <a:lnSpc>
-                <a:spcPts val="1950"/>
-              </a:lnSpc>
-              <a:spcAft>
-                <a:spcPts val="0"/>
-              </a:spcAft>
-              <a:buNone/>
-            </a:pPr>
-            <a:r>
-              <a:rPr lang="en-US" sz="1500" b="0">
-                <a:solidFill>
-                  <a:srgbClr val="202B33"/>
-                </a:solidFill>
-                <a:latin typeface="Arial"/>
-                <a:ea typeface="Arial"/>
-                <a:cs typeface="Arial"/>
-              </a:rPr>
-              <a:t xml:space="preserve">finding and mitigating faster than the</a:t>
-            </a:r>
-            <a:endParaRPr lang="en-US" sz="1500"/>
-          </a:p>
-          <a:p>
-            <a:pPr marL="0" indent="0">
-              <a:lnSpc>
-                <a:spcPts val="1950"/>
-              </a:lnSpc>
-              <a:spcAft>
-                <a:spcPts val="0"/>
-              </a:spcAft>
-              <a:buNone/>
-            </a:pPr>
-            <a:r>
-              <a:rPr lang="en-US" sz="1500" b="0">
-                <a:solidFill>
-                  <a:srgbClr val="202B33"/>
-                </a:solidFill>
-                <a:latin typeface="Arial"/>
-                <a:ea typeface="Arial"/>
-                <a:cs typeface="Arial"/>
-              </a:rPr>
-              <a:t xml:space="preserve">countless people trying to get in. That is</a:t>
-            </a:r>
-            <a:endParaRPr lang="en-US" sz="1500"/>
-          </a:p>
-          <a:p>
-            <a:pPr marL="0" indent="0">
-              <a:lnSpc>
-                <a:spcPts val="1950"/>
-              </a:lnSpc>
-              <a:spcAft>
-                <a:spcPts val="0"/>
-              </a:spcAft>
-              <a:buNone/>
-            </a:pPr>
-            <a:r>
-              <a:rPr lang="en-US" sz="1500" b="0">
-                <a:solidFill>
-                  <a:srgbClr val="202B33"/>
-                </a:solidFill>
-                <a:latin typeface="Arial"/>
-                <a:ea typeface="Arial"/>
-                <a:cs typeface="Arial"/>
-              </a:rPr>
-              <a:t xml:space="preserve">a permanent line item on a product that is</a:t>
-            </a:r>
-            <a:endParaRPr lang="en-US" sz="1500"/>
-          </a:p>
-          <a:p>
-            <a:pPr marL="0" indent="0">
-              <a:lnSpc>
-                <a:spcPts val="1950"/>
-              </a:lnSpc>
-              <a:spcAft>
-                <a:spcPts val="0"/>
-              </a:spcAft>
-              <a:buNone/>
-            </a:pPr>
-            <a:r>
-              <a:rPr lang="en-US" sz="1500" b="0">
-                <a:solidFill>
-                  <a:srgbClr val="202B33"/>
-                </a:solidFill>
-                <a:latin typeface="Arial"/>
-                <a:ea typeface="Arial"/>
-                <a:cs typeface="Arial"/>
-              </a:rPr>
-              <a:t xml:space="preserve">otherwise finished. It never completes.</a:t>
+              <a:t xml:space="preserve">of your own, self-hacking around the clock.</a:t>
+            </a:r>
+            <a:endParaRPr lang="en-US" sz="1500"/>
+          </a:p>
+          <a:p>
+            <a:pPr marL="0" indent="0">
+              <a:lnSpc>
+                <a:spcPts val="1950"/>
+              </a:lnSpc>
+              <a:spcAft>
+                <a:spcPts val="0"/>
+              </a:spcAft>
+              <a:buNone/>
+            </a:pPr>
+            <a:r>
+              <a:rPr lang="en-US" sz="1500" b="0">
+                <a:solidFill>
+                  <a:srgbClr val="202B33"/>
+                </a:solidFill>
+                <a:latin typeface="Arial"/>
+                <a:ea typeface="Arial"/>
+                <a:cs typeface="Arial"/>
+              </a:rPr>
+              <a:t xml:space="preserve">That is a permanent line item on a product</a:t>
+            </a:r>
+            <a:endParaRPr lang="en-US" sz="1500"/>
+          </a:p>
+          <a:p>
+            <a:pPr marL="0" indent="0">
+              <a:lnSpc>
+                <a:spcPts val="1950"/>
+              </a:lnSpc>
+              <a:spcAft>
+                <a:spcPts val="0"/>
+              </a:spcAft>
+              <a:buNone/>
+            </a:pPr>
+            <a:r>
+              <a:rPr lang="en-US" sz="1500" b="0">
+                <a:solidFill>
+                  <a:srgbClr val="202B33"/>
+                </a:solidFill>
+                <a:latin typeface="Arial"/>
+                <a:ea typeface="Arial"/>
+                <a:cs typeface="Arial"/>
+              </a:rPr>
+              <a:t xml:space="preserve">that is otherwise finished. It never</a:t>
+            </a:r>
+            <a:endParaRPr lang="en-US" sz="1500"/>
+          </a:p>
+          <a:p>
+            <a:pPr marL="0" indent="0">
+              <a:lnSpc>
+                <a:spcPts val="1950"/>
+              </a:lnSpc>
+              <a:spcAft>
+                <a:spcPts val="0"/>
+              </a:spcAft>
+              <a:buNone/>
+            </a:pPr>
+            <a:r>
+              <a:rPr lang="en-US" sz="1500" b="0">
+                <a:solidFill>
+                  <a:srgbClr val="202B33"/>
+                </a:solidFill>
+                <a:latin typeface="Arial"/>
+                <a:ea typeface="Arial"/>
+                <a:cs typeface="Arial"/>
+              </a:rPr>
+              <a:t xml:space="preserve">completes.</a:t>
             </a:r>
             <a:endParaRPr lang="en-US" sz="1500"/>
           </a:p>
@@ -15443,30 +15374,30 @@
                 <a:ea typeface="Arial"/>
                 <a:cs typeface="Arial"/>
               </a:rPr>
-              <a:t xml:space="preserve">the joke is the question from slide 12: an</a:t>
-            </a:r>
-            <a:endParaRPr lang="en-US" sz="1500"/>
-          </a:p>
-          <a:p>
-            <a:pPr marL="0" indent="0">
-              <a:lnSpc>
-                <a:spcPts val="1950"/>
-              </a:lnSpc>
-              <a:spcAft>
-                <a:spcPts val="0"/>
-              </a:spcAft>
-              <a:buNone/>
-            </a:pPr>
-            <a:r>
-              <a:rPr lang="en-US" sz="1500" b="0">
-                <a:solidFill>
-                  <a:srgbClr val="202B33"/>
-                </a:solidFill>
-                <a:latin typeface="Arial"/>
-                <a:ea typeface="Arial"/>
-                <a:cs typeface="Arial"/>
-              </a:rPr>
-              <a:t xml:space="preserve">agent whose account you revoked while its</a:t>
+              <a:t xml:space="preserve">the joke is slide 12's question: an agent</a:t>
+            </a:r>
+            <a:endParaRPr lang="en-US" sz="1500"/>
+          </a:p>
+          <a:p>
+            <a:pPr marL="0" indent="0">
+              <a:lnSpc>
+                <a:spcPts val="1950"/>
+              </a:lnSpc>
+              <a:spcAft>
+                <a:spcPts val="0"/>
+              </a:spcAft>
+              <a:buNone/>
+            </a:pPr>
+            <a:r>
+              <a:rPr lang="en-US" sz="1500" b="0">
+                <a:solidFill>
+                  <a:srgbClr val="202B33"/>
+                </a:solidFill>
+                <a:latin typeface="Arial"/>
+                <a:ea typeface="Arial"/>
+                <a:cs typeface="Arial"/>
+              </a:rPr>
+              <a:t xml:space="preserve">whose account you revoked while its</a:t>
             </a:r>
             <a:endParaRPr lang="en-US" sz="1500"/>
           </a:p>
@@ -15512,7 +15443,7 @@
                 <a:ea typeface="Arial"/>
                 <a:cs typeface="Arial"/>
               </a:rPr>
-              <a:t xml:space="preserve">version of this, and it happens today.</a:t>
+              <a:t xml:space="preserve">version, and it happens today.</a:t>
             </a:r>
             <a:endParaRPr lang="en-US" sz="1500"/>
           </a:p>
@@ -15581,168 +15512,122 @@
                 <a:ea typeface="Arial"/>
                 <a:cs typeface="Arial"/>
               </a:rPr>
-              <a:t xml:space="preserve">between agents, one of those wires is a</a:t>
-            </a:r>
-            <a:endParaRPr lang="en-US" sz="1500"/>
-          </a:p>
-          <a:p>
-            <a:pPr marL="0" indent="0">
-              <a:lnSpc>
-                <a:spcPts val="1950"/>
-              </a:lnSpc>
-              <a:spcAft>
-                <a:spcPts val="0"/>
-              </a:spcAft>
-              <a:buNone/>
-            </a:pPr>
-            <a:r>
-              <a:rPr lang="en-US" sz="1500" b="0">
-                <a:solidFill>
-                  <a:srgbClr val="202B33"/>
-                </a:solidFill>
-                <a:latin typeface="Arial"/>
-                <a:ea typeface="Arial"/>
-                <a:cs typeface="Arial"/>
-              </a:rPr>
-              <a:t xml:space="preserve">fuel line. The ongoing burn of a function</a:t>
-            </a:r>
-            <a:endParaRPr lang="en-US" sz="1500"/>
-          </a:p>
-          <a:p>
-            <a:pPr marL="0" indent="0">
-              <a:lnSpc>
-                <a:spcPts val="1950"/>
-              </a:lnSpc>
-              <a:spcAft>
-                <a:spcPts val="0"/>
-              </a:spcAft>
-              <a:buNone/>
-            </a:pPr>
-            <a:r>
-              <a:rPr lang="en-US" sz="1500" b="0">
-                <a:solidFill>
-                  <a:srgbClr val="202B33"/>
-                </a:solidFill>
-                <a:latin typeface="Arial"/>
-                <a:ea typeface="Arial"/>
-                <a:cs typeface="Arial"/>
-              </a:rPr>
-              <a:t xml:space="preserve">belongs in the design doc beside its</a:t>
-            </a:r>
-            <a:endParaRPr lang="en-US" sz="1500"/>
-          </a:p>
-          <a:p>
-            <a:pPr marL="0" indent="0">
-              <a:lnSpc>
-                <a:spcPts val="1950"/>
-              </a:lnSpc>
-              <a:spcAft>
-                <a:spcPts val="0"/>
-              </a:spcAft>
-              <a:buNone/>
-            </a:pPr>
-            <a:r>
-              <a:rPr lang="en-US" sz="1500" b="0">
-                <a:solidFill>
-                  <a:srgbClr val="202B33"/>
-                </a:solidFill>
-                <a:latin typeface="Arial"/>
-                <a:ea typeface="Arial"/>
-                <a:cs typeface="Arial"/>
-              </a:rPr>
-              <a:t xml:space="preserve">latency budget, and somebody owns that</a:t>
-            </a:r>
-            <a:endParaRPr lang="en-US" sz="1500"/>
-          </a:p>
-          <a:p>
-            <a:pPr marL="0" indent="0">
-              <a:lnSpc>
-                <a:spcPts val="1950"/>
-              </a:lnSpc>
-              <a:spcAft>
-                <a:spcPts val="0"/>
-              </a:spcAft>
-              <a:buNone/>
-            </a:pPr>
-            <a:r>
-              <a:rPr lang="en-US" sz="1500" b="0">
-                <a:solidFill>
-                  <a:srgbClr val="202B33"/>
-                </a:solidFill>
-                <a:latin typeface="Arial"/>
-                <a:ea typeface="Arial"/>
-                <a:cs typeface="Arial"/>
-              </a:rPr>
-              <a:t xml:space="preserve">meter. It is not the person who wrote the</a:t>
-            </a:r>
-            <a:endParaRPr lang="en-US" sz="1500"/>
-          </a:p>
-          <a:p>
-            <a:pPr marL="0" indent="0">
-              <a:lnSpc>
-                <a:spcPts val="1950"/>
-              </a:lnSpc>
-              <a:spcAft>
-                <a:spcPts val="0"/>
-              </a:spcAft>
-              <a:buNone/>
-            </a:pPr>
-            <a:r>
-              <a:rPr lang="en-US" sz="1500" b="0">
-                <a:solidFill>
-                  <a:srgbClr val="202B33"/>
-                </a:solidFill>
-                <a:latin typeface="Arial"/>
-                <a:ea typeface="Arial"/>
-                <a:cs typeface="Arial"/>
-              </a:rPr>
-              <a:t xml:space="preserve">prompt. Buy Me a Free Tier owns the</a:t>
-            </a:r>
-            <a:endParaRPr lang="en-US" sz="1500"/>
-          </a:p>
-          <a:p>
-            <a:pPr marL="0" indent="0">
-              <a:lnSpc>
-                <a:spcPts val="1950"/>
-              </a:lnSpc>
-              <a:spcAft>
-                <a:spcPts val="0"/>
-              </a:spcAft>
-              <a:buNone/>
-            </a:pPr>
-            <a:r>
-              <a:rPr lang="en-US" sz="1500" b="0">
-                <a:solidFill>
-                  <a:srgbClr val="202B33"/>
-                </a:solidFill>
-                <a:latin typeface="Arial"/>
-                <a:ea typeface="Arial"/>
-                <a:cs typeface="Arial"/>
-              </a:rPr>
-              <a:t xml:space="preserve">arithmetic; what belongs on this org chart</a:t>
-            </a:r>
-            <a:endParaRPr lang="en-US" sz="1500"/>
-          </a:p>
-          <a:p>
-            <a:pPr marL="0" indent="0">
-              <a:lnSpc>
-                <a:spcPts val="1950"/>
-              </a:lnSpc>
-              <a:spcAft>
-                <a:spcPts val="0"/>
-              </a:spcAft>
-              <a:buNone/>
-            </a:pPr>
-            <a:r>
-              <a:rPr lang="en-US" sz="1500" b="0">
-                <a:solidFill>
-                  <a:srgbClr val="202B33"/>
-                </a:solidFill>
-                <a:latin typeface="Arial"/>
-                <a:ea typeface="Arial"/>
-                <a:cs typeface="Arial"/>
-              </a:rPr>
-              <a:t xml:space="preserve">is the owner.</a:t>
+              <a:t xml:space="preserve">between agents, one of them is a fuel line.</a:t>
+            </a:r>
+            <a:endParaRPr lang="en-US" sz="1500"/>
+          </a:p>
+          <a:p>
+            <a:pPr marL="0" indent="0">
+              <a:lnSpc>
+                <a:spcPts val="1950"/>
+              </a:lnSpc>
+              <a:spcAft>
+                <a:spcPts val="0"/>
+              </a:spcAft>
+              <a:buNone/>
+            </a:pPr>
+            <a:r>
+              <a:rPr lang="en-US" sz="1500" b="0">
+                <a:solidFill>
+                  <a:srgbClr val="202B33"/>
+                </a:solidFill>
+                <a:latin typeface="Arial"/>
+                <a:ea typeface="Arial"/>
+                <a:cs typeface="Arial"/>
+              </a:rPr>
+              <a:t xml:space="preserve">The ongoing burn belongs in the design doc</a:t>
+            </a:r>
+            <a:endParaRPr lang="en-US" sz="1500"/>
+          </a:p>
+          <a:p>
+            <a:pPr marL="0" indent="0">
+              <a:lnSpc>
+                <a:spcPts val="1950"/>
+              </a:lnSpc>
+              <a:spcAft>
+                <a:spcPts val="0"/>
+              </a:spcAft>
+              <a:buNone/>
+            </a:pPr>
+            <a:r>
+              <a:rPr lang="en-US" sz="1500" b="0">
+                <a:solidFill>
+                  <a:srgbClr val="202B33"/>
+                </a:solidFill>
+                <a:latin typeface="Arial"/>
+                <a:ea typeface="Arial"/>
+                <a:cs typeface="Arial"/>
+              </a:rPr>
+              <a:t xml:space="preserve">beside the latency budget, and somebody</a:t>
+            </a:r>
+            <a:endParaRPr lang="en-US" sz="1500"/>
+          </a:p>
+          <a:p>
+            <a:pPr marL="0" indent="0">
+              <a:lnSpc>
+                <a:spcPts val="1950"/>
+              </a:lnSpc>
+              <a:spcAft>
+                <a:spcPts val="0"/>
+              </a:spcAft>
+              <a:buNone/>
+            </a:pPr>
+            <a:r>
+              <a:rPr lang="en-US" sz="1500" b="0">
+                <a:solidFill>
+                  <a:srgbClr val="202B33"/>
+                </a:solidFill>
+                <a:latin typeface="Arial"/>
+                <a:ea typeface="Arial"/>
+                <a:cs typeface="Arial"/>
+              </a:rPr>
+              <a:t xml:space="preserve">owns that meter. Not the person who wrote</a:t>
+            </a:r>
+            <a:endParaRPr lang="en-US" sz="1500"/>
+          </a:p>
+          <a:p>
+            <a:pPr marL="0" indent="0">
+              <a:lnSpc>
+                <a:spcPts val="1950"/>
+              </a:lnSpc>
+              <a:spcAft>
+                <a:spcPts val="0"/>
+              </a:spcAft>
+              <a:buNone/>
+            </a:pPr>
+            <a:r>
+              <a:rPr lang="en-US" sz="1500" b="0">
+                <a:solidFill>
+                  <a:srgbClr val="202B33"/>
+                </a:solidFill>
+                <a:latin typeface="Arial"/>
+                <a:ea typeface="Arial"/>
+                <a:cs typeface="Arial"/>
+              </a:rPr>
+              <a:t xml:space="preserve">the prompt. Buy Me a Free Tier owns the</a:t>
+            </a:r>
+            <a:endParaRPr lang="en-US" sz="1500"/>
+          </a:p>
+          <a:p>
+            <a:pPr marL="0" indent="0">
+              <a:lnSpc>
+                <a:spcPts val="1950"/>
+              </a:lnSpc>
+              <a:spcAft>
+                <a:spcPts val="0"/>
+              </a:spcAft>
+              <a:buNone/>
+            </a:pPr>
+            <a:r>
+              <a:rPr lang="en-US" sz="1500" b="0">
+                <a:solidFill>
+                  <a:srgbClr val="202B33"/>
+                </a:solidFill>
+                <a:latin typeface="Arial"/>
+                <a:ea typeface="Arial"/>
+                <a:cs typeface="Arial"/>
+              </a:rPr>
+              <a:t xml:space="preserve">arithmetic; this org chart owns the owner.</a:t>
             </a:r>
             <a:endParaRPr lang="en-US" sz="1500"/>
           </a:p>
@@ -16332,29 +16217,6 @@
             </a:r>
             <a:endParaRPr lang="en-US" sz="1200"/>
           </a:p>
-          <a:p>
-            <a:pPr marL="0" indent="0">
-              <a:lnSpc>
-                <a:spcPts val="1575"/>
-              </a:lnSpc>
-              <a:spcAft>
-                <a:spcPts val="0"/>
-              </a:spcAft>
-              <a:buNone/>
-            </a:pPr>
-            <a:r>
-              <a:rPr lang="en-US" sz="1200" b="0">
-                <a:solidFill>
-                  <a:srgbClr val="202B33"/>
-                </a:solidFill>
-                <a:latin typeface="Arial"/>
-                <a:ea typeface="Arial"/>
-                <a:cs typeface="Arial"/>
-              </a:rPr>
-              <a:t xml:space="preserve">somebody deprecates your dependency. Generation makes</a:t>
-            </a:r>
-            <a:endParaRPr lang="en-US" sz="1200"/>
-          </a:p>
         </p:txBody>
       </p:sp>
       <p:sp>
@@ -16400,6 +16262,29 @@
                 <a:ea typeface="Arial"/>
                 <a:cs typeface="Arial"/>
               </a:rPr>
+              <a:t xml:space="preserve">somebody deprecates your dependency. Generation makes</a:t>
+            </a:r>
+            <a:endParaRPr lang="en-US" sz="1200"/>
+          </a:p>
+          <a:p>
+            <a:pPr marL="0" indent="0">
+              <a:lnSpc>
+                <a:spcPts val="1575"/>
+              </a:lnSpc>
+              <a:spcAft>
+                <a:spcPts val="0"/>
+              </a:spcAft>
+              <a:buNone/>
+            </a:pPr>
+            <a:r>
+              <a:rPr lang="en-US" sz="1200" b="0">
+                <a:solidFill>
+                  <a:srgbClr val="202B33"/>
+                </a:solidFill>
+                <a:latin typeface="Arial"/>
+                <a:ea typeface="Arial"/>
+                <a:cs typeface="Arial"/>
+              </a:rPr>
               <a:t xml:space="preserve">the first version cheap. It does not make the tenth</a:t>
             </a:r>
             <a:endParaRPr lang="en-US" sz="1200"/>
@@ -16469,7 +16354,7 @@
                 <a:ea typeface="Arial"/>
                 <a:cs typeface="Arial"/>
               </a:rPr>
-              <a:t xml:space="preserve">And throwaway software is a taste most of this room</a:t>
+              <a:t xml:space="preserve">And throwaway software is a taste this room has and</a:t>
             </a:r>
             <a:endParaRPr lang="en-US" sz="1200"/>
           </a:p>
@@ -16492,7 +16377,7 @@
                 <a:ea typeface="Arial"/>
                 <a:cs typeface="Arial"/>
               </a:rPr>
-              <a:t xml:space="preserve">has and most of the world does not. We are early</a:t>
+              <a:t xml:space="preserve">the world does not. We are early adopters, delighted</a:t>
             </a:r>
             <a:endParaRPr lang="en-US" sz="1200"/>
           </a:p>
@@ -16515,7 +16400,7 @@
                 <a:ea typeface="Arial"/>
                 <a:cs typeface="Arial"/>
               </a:rPr>
-              <a:t xml:space="preserve">adopters; we are delighted to regenerate a tool</a:t>
+              <a:t xml:space="preserve">to regenerate a tool rather than maintain it. Normal</a:t>
             </a:r>
             <a:endParaRPr lang="en-US" sz="1200"/>
           </a:p>
@@ -16538,7 +16423,7 @@
                 <a:ea typeface="Arial"/>
                 <a:cs typeface="Arial"/>
               </a:rPr>
-              <a:t xml:space="preserve">rather than maintain it. Normal people are not turned</a:t>
+              <a:t xml:space="preserve">people are not turned on by vibe coding their own</a:t>
             </a:r>
             <a:endParaRPr lang="en-US" sz="1200"/>
           </a:p>
@@ -16561,7 +16446,7 @@
                 <a:ea typeface="Arial"/>
                 <a:cs typeface="Arial"/>
               </a:rPr>
-              <a:t xml:space="preserve">on by the idea of vibe coding their own recipe</a:t>
+              <a:t xml:space="preserve">recipe tracker, never mind a Slack replacement. What</a:t>
             </a:r>
             <a:endParaRPr lang="en-US" sz="1200"/>
           </a:p>
@@ -16584,7 +16469,7 @@
                 <a:ea typeface="Arial"/>
                 <a:cs typeface="Arial"/>
               </a:rPr>
-              <a:t xml:space="preserve">tracker, never mind a Slack replacement. What they</a:t>
+              <a:t xml:space="preserve">they will accept is an interface generated for them,</a:t>
             </a:r>
             <a:endParaRPr lang="en-US" sz="1200"/>
           </a:p>
@@ -16607,7 +16492,7 @@
                 <a:ea typeface="Arial"/>
                 <a:cs typeface="Arial"/>
               </a:rPr>
-              <a:t xml:space="preserve">will accept is an interface generated for them,</a:t>
+              <a:t xml:space="preserve">adapting in real time, that they never had to choose</a:t>
             </a:r>
             <a:endParaRPr lang="en-US" sz="1200"/>
           </a:p>
@@ -16630,30 +16515,7 @@
                 <a:ea typeface="Arial"/>
                 <a:cs typeface="Arial"/>
               </a:rPr>
-              <a:t xml:space="preserve">adapting in real time, that they never had to choose</a:t>
-            </a:r>
-            <a:endParaRPr lang="en-US" sz="1200"/>
-          </a:p>
-          <a:p>
-            <a:pPr marL="0" indent="0">
-              <a:lnSpc>
-                <a:spcPts val="1575"/>
-              </a:lnSpc>
-              <a:spcAft>
-                <a:spcPts val="0"/>
-              </a:spcAft>
-              <a:buNone/>
-            </a:pPr>
-            <a:r>
-              <a:rPr lang="en-US" sz="1200" b="0">
-                <a:solidFill>
-                  <a:srgbClr val="202B33"/>
-                </a:solidFill>
-                <a:latin typeface="Arial"/>
-                <a:ea typeface="Arial"/>
-                <a:cs typeface="Arial"/>
-              </a:rPr>
-              <a:t xml:space="preserve">from a menu of products.</a:t>
+              <a:t xml:space="preserve">off a shelf.</a:t>
             </a:r>
             <a:endParaRPr lang="en-US" sz="1200"/>
           </a:p>
@@ -16954,30 +16816,30 @@
                 <a:ea typeface="Arial"/>
                 <a:cs typeface="Arial"/>
               </a:rPr>
-              <a:t xml:space="preserve">actually be arguing about. Should OpenAI</a:t>
-            </a:r>
-            <a:endParaRPr lang="en-US" sz="1500"/>
-          </a:p>
-          <a:p>
-            <a:pPr marL="0" indent="0">
-              <a:lnSpc>
-                <a:spcPts val="1950"/>
-              </a:lnSpc>
-              <a:spcAft>
-                <a:spcPts val="0"/>
-              </a:spcAft>
-              <a:buNone/>
-            </a:pPr>
-            <a:r>
-              <a:rPr lang="en-US" sz="1500" b="0">
-                <a:solidFill>
-                  <a:srgbClr val="202B33"/>
-                </a:solidFill>
-                <a:latin typeface="Arial"/>
-                <a:ea typeface="Arial"/>
-                <a:cs typeface="Arial"/>
-              </a:rPr>
-              <a:t xml:space="preserve">and Anthropic end up owning every software</a:t>
+              <a:t xml:space="preserve">be arguing about. Should OpenAI and</a:t>
+            </a:r>
+            <a:endParaRPr lang="en-US" sz="1500"/>
+          </a:p>
+          <a:p>
+            <a:pPr marL="0" indent="0">
+              <a:lnSpc>
+                <a:spcPts val="1950"/>
+              </a:lnSpc>
+              <a:spcAft>
+                <a:spcPts val="0"/>
+              </a:spcAft>
+              <a:buNone/>
+            </a:pPr>
+            <a:r>
+              <a:rPr lang="en-US" sz="1500" b="0">
+                <a:solidFill>
+                  <a:srgbClr val="202B33"/>
+                </a:solidFill>
+                <a:latin typeface="Arial"/>
+                <a:ea typeface="Arial"/>
+                <a:cs typeface="Arial"/>
+              </a:rPr>
+              <a:t xml:space="preserve">Anthropic end up owning every software</a:t>
             </a:r>
             <a:endParaRPr lang="en-US" sz="1500"/>
           </a:p>
@@ -17069,168 +16931,145 @@
                 <a:ea typeface="Arial"/>
                 <a:cs typeface="Arial"/>
               </a:rPr>
-              <a:t xml:space="preserve">Google Docs then? I can already make and</a:t>
-            </a:r>
-            <a:endParaRPr lang="en-US" sz="1500"/>
-          </a:p>
-          <a:p>
-            <a:pPr marL="0" indent="0">
-              <a:lnSpc>
-                <a:spcPts val="1950"/>
-              </a:lnSpc>
-              <a:spcAft>
-                <a:spcPts val="0"/>
-              </a:spcAft>
-              <a:buNone/>
-            </a:pPr>
-            <a:r>
-              <a:rPr lang="en-US" sz="1500" b="0">
-                <a:solidFill>
-                  <a:srgbClr val="202B33"/>
-                </a:solidFill>
-                <a:latin typeface="Arial"/>
-                <a:ea typeface="Arial"/>
-                <a:cs typeface="Arial"/>
-              </a:rPr>
-              <a:t xml:space="preserve">edit images and video in ways that make me</a:t>
-            </a:r>
-            <a:endParaRPr lang="en-US" sz="1500"/>
-          </a:p>
-          <a:p>
-            <a:pPr marL="0" indent="0">
-              <a:lnSpc>
-                <a:spcPts val="1950"/>
-              </a:lnSpc>
-              <a:spcAft>
-                <a:spcPts val="0"/>
-              </a:spcAft>
-              <a:buNone/>
-            </a:pPr>
-            <a:r>
-              <a:rPr lang="en-US" sz="1500" b="0">
-                <a:solidFill>
-                  <a:srgbClr val="202B33"/>
-                </a:solidFill>
-                <a:latin typeface="Arial"/>
-                <a:ea typeface="Arial"/>
-                <a:cs typeface="Arial"/>
-              </a:rPr>
-              <a:t xml:space="preserve">less likely to open Photoshop or DaVinci.</a:t>
-            </a:r>
-            <a:endParaRPr lang="en-US" sz="1500"/>
-          </a:p>
-          <a:p>
-            <a:pPr marL="0" indent="0">
-              <a:lnSpc>
-                <a:spcPts val="1950"/>
-              </a:lnSpc>
-              <a:spcAft>
-                <a:spcPts val="0"/>
-              </a:spcAft>
-              <a:buNone/>
-            </a:pPr>
-            <a:r>
-              <a:rPr lang="en-US" sz="1500" b="0">
-                <a:solidFill>
-                  <a:srgbClr val="202B33"/>
-                </a:solidFill>
-                <a:latin typeface="Arial"/>
-                <a:ea typeface="Arial"/>
-                <a:cs typeface="Arial"/>
-              </a:rPr>
-              <a:t xml:space="preserve">If I need a jingle for the company, I ask</a:t>
-            </a:r>
-            <a:endParaRPr lang="en-US" sz="1500"/>
-          </a:p>
-          <a:p>
-            <a:pPr marL="0" indent="0">
-              <a:lnSpc>
-                <a:spcPts val="1950"/>
-              </a:lnSpc>
-              <a:spcAft>
-                <a:spcPts val="0"/>
-              </a:spcAft>
-              <a:buNone/>
-            </a:pPr>
-            <a:r>
-              <a:rPr lang="en-US" sz="1500" b="0">
-                <a:solidFill>
-                  <a:srgbClr val="202B33"/>
-                </a:solidFill>
-                <a:latin typeface="Arial"/>
-                <a:ea typeface="Arial"/>
-                <a:cs typeface="Arial"/>
-              </a:rPr>
-              <a:t xml:space="preserve">Suno and it is done. So is everything you</a:t>
-            </a:r>
-            <a:endParaRPr lang="en-US" sz="1500"/>
-          </a:p>
-          <a:p>
-            <a:pPr marL="0" indent="0">
-              <a:lnSpc>
-                <a:spcPts val="1950"/>
-              </a:lnSpc>
-              <a:spcAft>
-                <a:spcPts val="0"/>
-              </a:spcAft>
-              <a:buNone/>
-            </a:pPr>
-            <a:r>
-              <a:rPr lang="en-US" sz="1500" b="0">
-                <a:solidFill>
-                  <a:srgbClr val="202B33"/>
-                </a:solidFill>
-                <a:latin typeface="Arial"/>
-                <a:ea typeface="Arial"/>
-                <a:cs typeface="Arial"/>
-              </a:rPr>
-              <a:t xml:space="preserve">spent a lifetime learning, mastering and</a:t>
-            </a:r>
-            <a:endParaRPr lang="en-US" sz="1500"/>
-          </a:p>
-          <a:p>
-            <a:pPr marL="0" indent="0">
-              <a:lnSpc>
-                <a:spcPts val="1950"/>
-              </a:lnSpc>
-              <a:spcAft>
-                <a:spcPts val="0"/>
-              </a:spcAft>
-              <a:buNone/>
-            </a:pPr>
-            <a:r>
-              <a:rPr lang="en-US" sz="1500" b="0">
-                <a:solidFill>
-                  <a:srgbClr val="202B33"/>
-                </a:solidFill>
-                <a:latin typeface="Arial"/>
-                <a:ea typeface="Arial"/>
-                <a:cs typeface="Arial"/>
-              </a:rPr>
-              <a:t xml:space="preserve">fighting with about to be irrelevant? Yes.</a:t>
-            </a:r>
-            <a:endParaRPr lang="en-US" sz="1500"/>
-          </a:p>
-          <a:p>
-            <a:pPr marL="0" indent="0">
-              <a:lnSpc>
-                <a:spcPts val="1950"/>
-              </a:lnSpc>
-              <a:spcAft>
-                <a:spcPts val="0"/>
-              </a:spcAft>
-              <a:buNone/>
-            </a:pPr>
-            <a:r>
-              <a:rPr lang="en-US" sz="1500" b="0">
-                <a:solidFill>
-                  <a:srgbClr val="202B33"/>
-                </a:solidFill>
-                <a:latin typeface="Arial"/>
-                <a:ea typeface="Arial"/>
-                <a:cs typeface="Arial"/>
-              </a:rPr>
-              <a:t xml:space="preserve">At least as you know it.</a:t>
+              <a:t xml:space="preserve">Docs then? I can already edit images and</a:t>
+            </a:r>
+            <a:endParaRPr lang="en-US" sz="1500"/>
+          </a:p>
+          <a:p>
+            <a:pPr marL="0" indent="0">
+              <a:lnSpc>
+                <a:spcPts val="1950"/>
+              </a:lnSpc>
+              <a:spcAft>
+                <a:spcPts val="0"/>
+              </a:spcAft>
+              <a:buNone/>
+            </a:pPr>
+            <a:r>
+              <a:rPr lang="en-US" sz="1500" b="0">
+                <a:solidFill>
+                  <a:srgbClr val="202B33"/>
+                </a:solidFill>
+                <a:latin typeface="Arial"/>
+                <a:ea typeface="Arial"/>
+                <a:cs typeface="Arial"/>
+              </a:rPr>
+              <a:t xml:space="preserve">video in ways that make me less likely to</a:t>
+            </a:r>
+            <a:endParaRPr lang="en-US" sz="1500"/>
+          </a:p>
+          <a:p>
+            <a:pPr marL="0" indent="0">
+              <a:lnSpc>
+                <a:spcPts val="1950"/>
+              </a:lnSpc>
+              <a:spcAft>
+                <a:spcPts val="0"/>
+              </a:spcAft>
+              <a:buNone/>
+            </a:pPr>
+            <a:r>
+              <a:rPr lang="en-US" sz="1500" b="0">
+                <a:solidFill>
+                  <a:srgbClr val="202B33"/>
+                </a:solidFill>
+                <a:latin typeface="Arial"/>
+                <a:ea typeface="Arial"/>
+                <a:cs typeface="Arial"/>
+              </a:rPr>
+              <a:t xml:space="preserve">open Photoshop or DaVinci, and if I need a</a:t>
+            </a:r>
+            <a:endParaRPr lang="en-US" sz="1500"/>
+          </a:p>
+          <a:p>
+            <a:pPr marL="0" indent="0">
+              <a:lnSpc>
+                <a:spcPts val="1950"/>
+              </a:lnSpc>
+              <a:spcAft>
+                <a:spcPts val="0"/>
+              </a:spcAft>
+              <a:buNone/>
+            </a:pPr>
+            <a:r>
+              <a:rPr lang="en-US" sz="1500" b="0">
+                <a:solidFill>
+                  <a:srgbClr val="202B33"/>
+                </a:solidFill>
+                <a:latin typeface="Arial"/>
+                <a:ea typeface="Arial"/>
+                <a:cs typeface="Arial"/>
+              </a:rPr>
+              <a:t xml:space="preserve">jingle I ask Suno and it is done. So is</a:t>
+            </a:r>
+            <a:endParaRPr lang="en-US" sz="1500"/>
+          </a:p>
+          <a:p>
+            <a:pPr marL="0" indent="0">
+              <a:lnSpc>
+                <a:spcPts val="1950"/>
+              </a:lnSpc>
+              <a:spcAft>
+                <a:spcPts val="0"/>
+              </a:spcAft>
+              <a:buNone/>
+            </a:pPr>
+            <a:r>
+              <a:rPr lang="en-US" sz="1500" b="0">
+                <a:solidFill>
+                  <a:srgbClr val="202B33"/>
+                </a:solidFill>
+                <a:latin typeface="Arial"/>
+                <a:ea typeface="Arial"/>
+                <a:cs typeface="Arial"/>
+              </a:rPr>
+              <a:t xml:space="preserve">everything you spent a lifetime mastering</a:t>
+            </a:r>
+            <a:endParaRPr lang="en-US" sz="1500"/>
+          </a:p>
+          <a:p>
+            <a:pPr marL="0" indent="0">
+              <a:lnSpc>
+                <a:spcPts val="1950"/>
+              </a:lnSpc>
+              <a:spcAft>
+                <a:spcPts val="0"/>
+              </a:spcAft>
+              <a:buNone/>
+            </a:pPr>
+            <a:r>
+              <a:rPr lang="en-US" sz="1500" b="0">
+                <a:solidFill>
+                  <a:srgbClr val="202B33"/>
+                </a:solidFill>
+                <a:latin typeface="Arial"/>
+                <a:ea typeface="Arial"/>
+                <a:cs typeface="Arial"/>
+              </a:rPr>
+              <a:t xml:space="preserve">about to be irrelevant? Yes. At least as</a:t>
+            </a:r>
+            <a:endParaRPr lang="en-US" sz="1500"/>
+          </a:p>
+          <a:p>
+            <a:pPr marL="0" indent="0">
+              <a:lnSpc>
+                <a:spcPts val="1950"/>
+              </a:lnSpc>
+              <a:spcAft>
+                <a:spcPts val="0"/>
+              </a:spcAft>
+              <a:buNone/>
+            </a:pPr>
+            <a:r>
+              <a:rPr lang="en-US" sz="1500" b="0">
+                <a:solidFill>
+                  <a:srgbClr val="202B33"/>
+                </a:solidFill>
+                <a:latin typeface="Arial"/>
+                <a:ea typeface="Arial"/>
+                <a:cs typeface="Arial"/>
+              </a:rPr>
+              <a:t xml:space="preserve">you know it.</a:t>
             </a:r>
             <a:endParaRPr lang="en-US" sz="1500"/>
           </a:p>
@@ -17509,237 +17348,214 @@
                 <a:ea typeface="Arial"/>
                 <a:cs typeface="Arial"/>
               </a:rPr>
-              <a:t xml:space="preserve">being pretty good does not mean the story</a:t>
-            </a:r>
-            <a:endParaRPr lang="en-US" sz="1500"/>
-          </a:p>
-          <a:p>
-            <a:pPr marL="0" indent="0">
-              <a:lnSpc>
-                <a:spcPts val="1950"/>
-              </a:lnSpc>
-              <a:spcAft>
-                <a:spcPts val="0"/>
-              </a:spcAft>
-              <a:buNone/>
-            </a:pPr>
-            <a:r>
-              <a:rPr lang="en-US" sz="1500" b="0">
-                <a:solidFill>
-                  <a:srgbClr val="202B33"/>
-                </a:solidFill>
-                <a:latin typeface="Arial"/>
-                <a:ea typeface="Arial"/>
-                <a:cs typeface="Arial"/>
-              </a:rPr>
-              <a:t xml:space="preserve">of image creation belongs to the big</a:t>
-            </a:r>
-            <a:endParaRPr lang="en-US" sz="1500"/>
-          </a:p>
-          <a:p>
-            <a:pPr marL="0" indent="0">
-              <a:lnSpc>
-                <a:spcPts val="1950"/>
-              </a:lnSpc>
-              <a:spcAft>
-                <a:spcPts val="0"/>
-              </a:spcAft>
-              <a:buNone/>
-            </a:pPr>
-            <a:r>
-              <a:rPr lang="en-US" sz="1500" b="0">
-                <a:solidFill>
-                  <a:srgbClr val="202B33"/>
-                </a:solidFill>
-                <a:latin typeface="Arial"/>
-                <a:ea typeface="Arial"/>
-                <a:cs typeface="Arial"/>
-              </a:rPr>
-              <a:t xml:space="preserve">players, and the same is true in whichever</a:t>
-            </a:r>
-            <a:endParaRPr lang="en-US" sz="1500"/>
-          </a:p>
-          <a:p>
-            <a:pPr marL="0" indent="0">
-              <a:lnSpc>
-                <a:spcPts val="1950"/>
-              </a:lnSpc>
-              <a:spcAft>
-                <a:spcPts val="0"/>
-              </a:spcAft>
-              <a:buNone/>
-            </a:pPr>
-            <a:r>
-              <a:rPr lang="en-US" sz="1500" b="0">
-                <a:solidFill>
-                  <a:srgbClr val="202B33"/>
-                </a:solidFill>
-                <a:latin typeface="Arial"/>
-                <a:ea typeface="Arial"/>
-                <a:cs typeface="Arial"/>
-              </a:rPr>
-              <a:t xml:space="preserve">industry you work in. Those of us who do</a:t>
-            </a:r>
-            <a:endParaRPr lang="en-US" sz="1500"/>
-          </a:p>
-          <a:p>
-            <a:pPr marL="0" indent="0">
-              <a:lnSpc>
-                <a:spcPts val="1950"/>
-              </a:lnSpc>
-              <a:spcAft>
-                <a:spcPts val="0"/>
-              </a:spcAft>
-              <a:buNone/>
-            </a:pPr>
-            <a:r>
-              <a:rPr lang="en-US" sz="1500" b="0">
-                <a:solidFill>
-                  <a:srgbClr val="202B33"/>
-                </a:solidFill>
-                <a:latin typeface="Arial"/>
-                <a:ea typeface="Arial"/>
-                <a:cs typeface="Arial"/>
-              </a:rPr>
-              <a:t xml:space="preserve">not work at a frontier lab, the organic</a:t>
-            </a:r>
-            <a:endParaRPr lang="en-US" sz="1500"/>
-          </a:p>
-          <a:p>
-            <a:pPr marL="0" indent="0">
-              <a:lnSpc>
-                <a:spcPts val="1950"/>
-              </a:lnSpc>
-              <a:spcAft>
-                <a:spcPts val="0"/>
-              </a:spcAft>
-              <a:buNone/>
-            </a:pPr>
-            <a:r>
-              <a:rPr lang="en-US" sz="1500" b="0">
-                <a:solidFill>
-                  <a:srgbClr val="202B33"/>
-                </a:solidFill>
-                <a:latin typeface="Arial"/>
-                <a:ea typeface="Arial"/>
-                <a:cs typeface="Arial"/>
-              </a:rPr>
-              <a:t xml:space="preserve">agents in the room, get to rethink any and</a:t>
-            </a:r>
-            <a:endParaRPr lang="en-US" sz="1500"/>
-          </a:p>
-          <a:p>
-            <a:pPr marL="0" indent="0">
-              <a:lnSpc>
-                <a:spcPts val="1950"/>
-              </a:lnSpc>
-              <a:spcAft>
-                <a:spcPts val="0"/>
-              </a:spcAft>
-              <a:buNone/>
-            </a:pPr>
-            <a:r>
-              <a:rPr lang="en-US" sz="1500" b="0">
-                <a:solidFill>
-                  <a:srgbClr val="202B33"/>
-                </a:solidFill>
-                <a:latin typeface="Arial"/>
-                <a:ea typeface="Arial"/>
-                <a:cs typeface="Arial"/>
-              </a:rPr>
-              <a:t xml:space="preserve">every app as an AI-native system from the</a:t>
-            </a:r>
-            <a:endParaRPr lang="en-US" sz="1500"/>
-          </a:p>
-          <a:p>
-            <a:pPr marL="0" indent="0">
-              <a:lnSpc>
-                <a:spcPts val="1950"/>
-              </a:lnSpc>
-              <a:spcAft>
-                <a:spcPts val="0"/>
-              </a:spcAft>
-              <a:buNone/>
-            </a:pPr>
-            <a:r>
-              <a:rPr lang="en-US" sz="1500" b="0">
-                <a:solidFill>
-                  <a:srgbClr val="202B33"/>
-                </a:solidFill>
-                <a:latin typeface="Arial"/>
-                <a:ea typeface="Arial"/>
-                <a:cs typeface="Arial"/>
-              </a:rPr>
-              <a:t xml:space="preserve">boundary up. That is this whole talk one</a:t>
-            </a:r>
-            <a:endParaRPr lang="en-US" sz="1500"/>
-          </a:p>
-          <a:p>
-            <a:pPr marL="0" indent="0">
-              <a:lnSpc>
-                <a:spcPts val="1950"/>
-              </a:lnSpc>
-              <a:spcAft>
-                <a:spcPts val="0"/>
-              </a:spcAft>
-              <a:buNone/>
-            </a:pPr>
-            <a:r>
-              <a:rPr lang="en-US" sz="1500" b="0">
-                <a:solidFill>
-                  <a:srgbClr val="202B33"/>
-                </a:solidFill>
-                <a:latin typeface="Arial"/>
-                <a:ea typeface="Arial"/>
-                <a:cs typeface="Arial"/>
-              </a:rPr>
-              <a:t xml:space="preserve">level higher: do not photocopy today's</a:t>
-            </a:r>
-            <a:endParaRPr lang="en-US" sz="1500"/>
-          </a:p>
-          <a:p>
-            <a:pPr marL="0" indent="0">
-              <a:lnSpc>
-                <a:spcPts val="1950"/>
-              </a:lnSpc>
-              <a:spcAft>
-                <a:spcPts val="0"/>
-              </a:spcAft>
-              <a:buNone/>
-            </a:pPr>
-            <a:r>
-              <a:rPr lang="en-US" sz="1500" b="0">
-                <a:solidFill>
-                  <a:srgbClr val="202B33"/>
-                </a:solidFill>
-                <a:latin typeface="Arial"/>
-                <a:ea typeface="Arial"/>
-                <a:cs typeface="Arial"/>
-              </a:rPr>
-              <a:t xml:space="preserve">product categories onto tomorrow's</a:t>
-            </a:r>
-            <a:endParaRPr lang="en-US" sz="1500"/>
-          </a:p>
-          <a:p>
-            <a:pPr marL="0" indent="0">
-              <a:lnSpc>
-                <a:spcPts val="1950"/>
-              </a:lnSpc>
-              <a:spcAft>
-                <a:spcPts val="0"/>
-              </a:spcAft>
-              <a:buNone/>
-            </a:pPr>
-            <a:r>
-              <a:rPr lang="en-US" sz="1500" b="0">
-                <a:solidFill>
-                  <a:srgbClr val="202B33"/>
-                </a:solidFill>
-                <a:latin typeface="Arial"/>
-                <a:ea typeface="Arial"/>
-                <a:cs typeface="Arial"/>
-              </a:rPr>
-              <a:t xml:space="preserve">substrate either.</a:t>
+              <a:t xml:space="preserve">being pretty good does not mean image</a:t>
+            </a:r>
+            <a:endParaRPr lang="en-US" sz="1500"/>
+          </a:p>
+          <a:p>
+            <a:pPr marL="0" indent="0">
+              <a:lnSpc>
+                <a:spcPts val="1950"/>
+              </a:lnSpc>
+              <a:spcAft>
+                <a:spcPts val="0"/>
+              </a:spcAft>
+              <a:buNone/>
+            </a:pPr>
+            <a:r>
+              <a:rPr lang="en-US" sz="1500" b="0">
+                <a:solidFill>
+                  <a:srgbClr val="202B33"/>
+                </a:solidFill>
+                <a:latin typeface="Arial"/>
+                <a:ea typeface="Arial"/>
+                <a:cs typeface="Arial"/>
+              </a:rPr>
+              <a:t xml:space="preserve">creation belongs to the big players, and</a:t>
+            </a:r>
+            <a:endParaRPr lang="en-US" sz="1500"/>
+          </a:p>
+          <a:p>
+            <a:pPr marL="0" indent="0">
+              <a:lnSpc>
+                <a:spcPts val="1950"/>
+              </a:lnSpc>
+              <a:spcAft>
+                <a:spcPts val="0"/>
+              </a:spcAft>
+              <a:buNone/>
+            </a:pPr>
+            <a:r>
+              <a:rPr lang="en-US" sz="1500" b="0">
+                <a:solidFill>
+                  <a:srgbClr val="202B33"/>
+                </a:solidFill>
+                <a:latin typeface="Arial"/>
+                <a:ea typeface="Arial"/>
+                <a:cs typeface="Arial"/>
+              </a:rPr>
+              <a:t xml:space="preserve">the same holds in whichever industry you</a:t>
+            </a:r>
+            <a:endParaRPr lang="en-US" sz="1500"/>
+          </a:p>
+          <a:p>
+            <a:pPr marL="0" indent="0">
+              <a:lnSpc>
+                <a:spcPts val="1950"/>
+              </a:lnSpc>
+              <a:spcAft>
+                <a:spcPts val="0"/>
+              </a:spcAft>
+              <a:buNone/>
+            </a:pPr>
+            <a:r>
+              <a:rPr lang="en-US" sz="1500" b="0">
+                <a:solidFill>
+                  <a:srgbClr val="202B33"/>
+                </a:solidFill>
+                <a:latin typeface="Arial"/>
+                <a:ea typeface="Arial"/>
+                <a:cs typeface="Arial"/>
+              </a:rPr>
+              <a:t xml:space="preserve">work in. Those of us who do not work at a</a:t>
+            </a:r>
+            <a:endParaRPr lang="en-US" sz="1500"/>
+          </a:p>
+          <a:p>
+            <a:pPr marL="0" indent="0">
+              <a:lnSpc>
+                <a:spcPts val="1950"/>
+              </a:lnSpc>
+              <a:spcAft>
+                <a:spcPts val="0"/>
+              </a:spcAft>
+              <a:buNone/>
+            </a:pPr>
+            <a:r>
+              <a:rPr lang="en-US" sz="1500" b="0">
+                <a:solidFill>
+                  <a:srgbClr val="202B33"/>
+                </a:solidFill>
+                <a:latin typeface="Arial"/>
+                <a:ea typeface="Arial"/>
+                <a:cs typeface="Arial"/>
+              </a:rPr>
+              <a:t xml:space="preserve">frontier lab — the organic agents in the</a:t>
+            </a:r>
+            <a:endParaRPr lang="en-US" sz="1500"/>
+          </a:p>
+          <a:p>
+            <a:pPr marL="0" indent="0">
+              <a:lnSpc>
+                <a:spcPts val="1950"/>
+              </a:lnSpc>
+              <a:spcAft>
+                <a:spcPts val="0"/>
+              </a:spcAft>
+              <a:buNone/>
+            </a:pPr>
+            <a:r>
+              <a:rPr lang="en-US" sz="1500" b="0">
+                <a:solidFill>
+                  <a:srgbClr val="202B33"/>
+                </a:solidFill>
+                <a:latin typeface="Arial"/>
+                <a:ea typeface="Arial"/>
+                <a:cs typeface="Arial"/>
+              </a:rPr>
+              <a:t xml:space="preserve">room — get to rethink any and every app as</a:t>
+            </a:r>
+            <a:endParaRPr lang="en-US" sz="1500"/>
+          </a:p>
+          <a:p>
+            <a:pPr marL="0" indent="0">
+              <a:lnSpc>
+                <a:spcPts val="1950"/>
+              </a:lnSpc>
+              <a:spcAft>
+                <a:spcPts val="0"/>
+              </a:spcAft>
+              <a:buNone/>
+            </a:pPr>
+            <a:r>
+              <a:rPr lang="en-US" sz="1500" b="0">
+                <a:solidFill>
+                  <a:srgbClr val="202B33"/>
+                </a:solidFill>
+                <a:latin typeface="Arial"/>
+                <a:ea typeface="Arial"/>
+                <a:cs typeface="Arial"/>
+              </a:rPr>
+              <a:t xml:space="preserve">an AI-native system, from the boundary up.</a:t>
+            </a:r>
+            <a:endParaRPr lang="en-US" sz="1500"/>
+          </a:p>
+          <a:p>
+            <a:pPr marL="0" indent="0">
+              <a:lnSpc>
+                <a:spcPts val="1950"/>
+              </a:lnSpc>
+              <a:spcAft>
+                <a:spcPts val="0"/>
+              </a:spcAft>
+              <a:buNone/>
+            </a:pPr>
+            <a:r>
+              <a:rPr lang="en-US" sz="1500" b="0">
+                <a:solidFill>
+                  <a:srgbClr val="202B33"/>
+                </a:solidFill>
+                <a:latin typeface="Arial"/>
+                <a:ea typeface="Arial"/>
+                <a:cs typeface="Arial"/>
+              </a:rPr>
+              <a:t xml:space="preserve">That is this whole talk one level higher:</a:t>
+            </a:r>
+            <a:endParaRPr lang="en-US" sz="1500"/>
+          </a:p>
+          <a:p>
+            <a:pPr marL="0" indent="0">
+              <a:lnSpc>
+                <a:spcPts val="1950"/>
+              </a:lnSpc>
+              <a:spcAft>
+                <a:spcPts val="0"/>
+              </a:spcAft>
+              <a:buNone/>
+            </a:pPr>
+            <a:r>
+              <a:rPr lang="en-US" sz="1500" b="0">
+                <a:solidFill>
+                  <a:srgbClr val="202B33"/>
+                </a:solidFill>
+                <a:latin typeface="Arial"/>
+                <a:ea typeface="Arial"/>
+                <a:cs typeface="Arial"/>
+              </a:rPr>
+              <a:t xml:space="preserve">do not photocopy today's product categories</a:t>
+            </a:r>
+            <a:endParaRPr lang="en-US" sz="1500"/>
+          </a:p>
+          <a:p>
+            <a:pPr marL="0" indent="0">
+              <a:lnSpc>
+                <a:spcPts val="1950"/>
+              </a:lnSpc>
+              <a:spcAft>
+                <a:spcPts val="0"/>
+              </a:spcAft>
+              <a:buNone/>
+            </a:pPr>
+            <a:r>
+              <a:rPr lang="en-US" sz="1500" b="0">
+                <a:solidFill>
+                  <a:srgbClr val="202B33"/>
+                </a:solidFill>
+                <a:latin typeface="Arial"/>
+                <a:ea typeface="Arial"/>
+                <a:cs typeface="Arial"/>
+              </a:rPr>
+              <a:t xml:space="preserve">onto tomorrow's substrate either.</a:t>
             </a:r>
             <a:endParaRPr lang="en-US" sz="1500"/>
           </a:p>
